--- a/docs/pptx/entire/ritu-entire-linsubhr-sens-grade3.pptx
+++ b/docs/pptx/entire/ritu-entire-linsubhr-sens-grade3.pptx
@@ -3045,612 +3045,612 @@
           </p:nvSpPr>
           <p:spPr>
             <a:xfrm>
-              <a:off x="1172049" y="2697812"/>
-              <a:ext cx="7090630" cy="2700903"/>
+              <a:off x="1172049" y="2683972"/>
+              <a:ext cx="7090630" cy="2715764"/>
             </a:xfrm>
             <a:custGeom>
               <a:avLst/>
               <a:pathLst>
-                <a:path w="7090630" h="2700903">
+                <a:path w="7090630" h="2715764">
                   <a:moveTo>
                     <a:pt x="0" y="0"/>
                   </a:moveTo>
                   <a:lnTo>
-                    <a:pt x="71622" y="82333"/>
-                  </a:lnTo>
-                  <a:lnTo>
-                    <a:pt x="143245" y="162296"/>
-                  </a:lnTo>
-                  <a:lnTo>
-                    <a:pt x="214867" y="239956"/>
-                  </a:lnTo>
-                  <a:lnTo>
-                    <a:pt x="286490" y="315381"/>
-                  </a:lnTo>
-                  <a:lnTo>
-                    <a:pt x="358112" y="388633"/>
-                  </a:lnTo>
-                  <a:lnTo>
-                    <a:pt x="429735" y="459777"/>
-                  </a:lnTo>
-                  <a:lnTo>
-                    <a:pt x="501357" y="528872"/>
-                  </a:lnTo>
-                  <a:lnTo>
-                    <a:pt x="572980" y="595977"/>
-                  </a:lnTo>
-                  <a:lnTo>
-                    <a:pt x="644602" y="661150"/>
-                  </a:lnTo>
-                  <a:lnTo>
-                    <a:pt x="716225" y="724447"/>
-                  </a:lnTo>
-                  <a:lnTo>
-                    <a:pt x="787847" y="785921"/>
-                  </a:lnTo>
-                  <a:lnTo>
-                    <a:pt x="859470" y="845625"/>
-                  </a:lnTo>
-                  <a:lnTo>
-                    <a:pt x="931092" y="903610"/>
-                  </a:lnTo>
-                  <a:lnTo>
-                    <a:pt x="1002715" y="959925"/>
-                  </a:lnTo>
-                  <a:lnTo>
-                    <a:pt x="1074337" y="1014619"/>
-                  </a:lnTo>
-                  <a:lnTo>
-                    <a:pt x="1145960" y="1067738"/>
-                  </a:lnTo>
-                  <a:lnTo>
-                    <a:pt x="1217582" y="1119328"/>
-                  </a:lnTo>
-                  <a:lnTo>
-                    <a:pt x="1289205" y="1169432"/>
-                  </a:lnTo>
-                  <a:lnTo>
-                    <a:pt x="1360827" y="1218093"/>
-                  </a:lnTo>
-                  <a:lnTo>
-                    <a:pt x="1432450" y="1265353"/>
-                  </a:lnTo>
-                  <a:lnTo>
-                    <a:pt x="1504073" y="1311253"/>
-                  </a:lnTo>
-                  <a:lnTo>
-                    <a:pt x="1575695" y="1355831"/>
-                  </a:lnTo>
-                  <a:lnTo>
-                    <a:pt x="1647318" y="1399125"/>
-                  </a:lnTo>
-                  <a:lnTo>
-                    <a:pt x="1718940" y="1441173"/>
-                  </a:lnTo>
-                  <a:lnTo>
-                    <a:pt x="1790563" y="1482010"/>
-                  </a:lnTo>
-                  <a:lnTo>
-                    <a:pt x="1862185" y="1521671"/>
-                  </a:lnTo>
-                  <a:lnTo>
-                    <a:pt x="1933808" y="1560190"/>
-                  </a:lnTo>
-                  <a:lnTo>
-                    <a:pt x="2005430" y="1597600"/>
-                  </a:lnTo>
-                  <a:lnTo>
-                    <a:pt x="2077053" y="1633933"/>
-                  </a:lnTo>
-                  <a:lnTo>
-                    <a:pt x="2148675" y="1669219"/>
-                  </a:lnTo>
-                  <a:lnTo>
-                    <a:pt x="2220298" y="1703490"/>
-                  </a:lnTo>
-                  <a:lnTo>
-                    <a:pt x="2291920" y="1736774"/>
-                  </a:lnTo>
-                  <a:lnTo>
-                    <a:pt x="2363543" y="1769100"/>
-                  </a:lnTo>
-                  <a:lnTo>
-                    <a:pt x="2435165" y="1800494"/>
-                  </a:lnTo>
-                  <a:lnTo>
-                    <a:pt x="2506788" y="1830985"/>
-                  </a:lnTo>
-                  <a:lnTo>
-                    <a:pt x="2578410" y="1860598"/>
-                  </a:lnTo>
-                  <a:lnTo>
-                    <a:pt x="2650033" y="1889358"/>
-                  </a:lnTo>
-                  <a:lnTo>
-                    <a:pt x="2721655" y="1917290"/>
-                  </a:lnTo>
-                  <a:lnTo>
-                    <a:pt x="2793278" y="1944418"/>
-                  </a:lnTo>
-                  <a:lnTo>
-                    <a:pt x="2864901" y="1970765"/>
-                  </a:lnTo>
-                  <a:lnTo>
-                    <a:pt x="2936523" y="1996353"/>
-                  </a:lnTo>
-                  <a:lnTo>
-                    <a:pt x="3008146" y="2021204"/>
-                  </a:lnTo>
-                  <a:lnTo>
-                    <a:pt x="3079768" y="2036399"/>
-                  </a:lnTo>
-                  <a:lnTo>
-                    <a:pt x="3151391" y="2046338"/>
-                  </a:lnTo>
-                  <a:lnTo>
-                    <a:pt x="3223013" y="2056158"/>
-                  </a:lnTo>
-                  <a:lnTo>
-                    <a:pt x="3294636" y="2065859"/>
-                  </a:lnTo>
-                  <a:lnTo>
-                    <a:pt x="3366258" y="2075442"/>
-                  </a:lnTo>
-                  <a:lnTo>
-                    <a:pt x="3437881" y="2084910"/>
-                  </a:lnTo>
-                  <a:lnTo>
-                    <a:pt x="3509503" y="2094264"/>
-                  </a:lnTo>
-                  <a:lnTo>
-                    <a:pt x="3581126" y="2103505"/>
-                  </a:lnTo>
-                  <a:lnTo>
-                    <a:pt x="3652748" y="2112634"/>
-                  </a:lnTo>
-                  <a:lnTo>
-                    <a:pt x="3724371" y="2121653"/>
-                  </a:lnTo>
-                  <a:lnTo>
-                    <a:pt x="3795993" y="2130563"/>
-                  </a:lnTo>
-                  <a:lnTo>
-                    <a:pt x="3867616" y="2139365"/>
-                  </a:lnTo>
-                  <a:lnTo>
-                    <a:pt x="3939238" y="2148061"/>
-                  </a:lnTo>
-                  <a:lnTo>
-                    <a:pt x="4010861" y="2156652"/>
-                  </a:lnTo>
-                  <a:lnTo>
-                    <a:pt x="4082483" y="2165139"/>
-                  </a:lnTo>
-                  <a:lnTo>
-                    <a:pt x="4154106" y="2173524"/>
-                  </a:lnTo>
-                  <a:lnTo>
-                    <a:pt x="4225729" y="2181808"/>
-                  </a:lnTo>
-                  <a:lnTo>
-                    <a:pt x="4297351" y="2189991"/>
-                  </a:lnTo>
-                  <a:lnTo>
-                    <a:pt x="4368974" y="2198076"/>
-                  </a:lnTo>
-                  <a:lnTo>
-                    <a:pt x="4440596" y="2206063"/>
-                  </a:lnTo>
-                  <a:lnTo>
-                    <a:pt x="4512219" y="2213954"/>
-                  </a:lnTo>
-                  <a:lnTo>
-                    <a:pt x="4583841" y="2221749"/>
-                  </a:lnTo>
-                  <a:lnTo>
-                    <a:pt x="4655464" y="2229450"/>
-                  </a:lnTo>
-                  <a:lnTo>
-                    <a:pt x="4727086" y="2237058"/>
-                  </a:lnTo>
-                  <a:lnTo>
-                    <a:pt x="4798709" y="2244574"/>
-                  </a:lnTo>
-                  <a:lnTo>
-                    <a:pt x="4870331" y="2252000"/>
-                  </a:lnTo>
-                  <a:lnTo>
-                    <a:pt x="4941954" y="2259336"/>
-                  </a:lnTo>
-                  <a:lnTo>
-                    <a:pt x="5013576" y="2266583"/>
-                  </a:lnTo>
-                  <a:lnTo>
-                    <a:pt x="5085199" y="2273743"/>
-                  </a:lnTo>
-                  <a:lnTo>
-                    <a:pt x="5156821" y="2280816"/>
-                  </a:lnTo>
-                  <a:lnTo>
-                    <a:pt x="5228444" y="2287804"/>
-                  </a:lnTo>
-                  <a:lnTo>
-                    <a:pt x="5300066" y="2294707"/>
-                  </a:lnTo>
-                  <a:lnTo>
-                    <a:pt x="5371689" y="2301527"/>
-                  </a:lnTo>
-                  <a:lnTo>
-                    <a:pt x="5443311" y="2308265"/>
-                  </a:lnTo>
-                  <a:lnTo>
-                    <a:pt x="5514934" y="2314921"/>
-                  </a:lnTo>
-                  <a:lnTo>
-                    <a:pt x="5586557" y="2321497"/>
-                  </a:lnTo>
-                  <a:lnTo>
-                    <a:pt x="5658179" y="2327993"/>
-                  </a:lnTo>
-                  <a:lnTo>
-                    <a:pt x="5729802" y="2334412"/>
-                  </a:lnTo>
-                  <a:lnTo>
-                    <a:pt x="5801424" y="2340752"/>
-                  </a:lnTo>
-                  <a:lnTo>
-                    <a:pt x="5873047" y="2347016"/>
-                  </a:lnTo>
-                  <a:lnTo>
-                    <a:pt x="5944669" y="2353204"/>
-                  </a:lnTo>
-                  <a:lnTo>
-                    <a:pt x="6016292" y="2359318"/>
-                  </a:lnTo>
-                  <a:lnTo>
-                    <a:pt x="6087914" y="2365358"/>
-                  </a:lnTo>
-                  <a:lnTo>
-                    <a:pt x="6159537" y="2371325"/>
-                  </a:lnTo>
-                  <a:lnTo>
-                    <a:pt x="6231159" y="2377219"/>
-                  </a:lnTo>
-                  <a:lnTo>
-                    <a:pt x="6302782" y="2383043"/>
-                  </a:lnTo>
-                  <a:lnTo>
-                    <a:pt x="6374404" y="2388796"/>
-                  </a:lnTo>
-                  <a:lnTo>
-                    <a:pt x="6446027" y="2394480"/>
-                  </a:lnTo>
-                  <a:lnTo>
-                    <a:pt x="6517649" y="2400095"/>
-                  </a:lnTo>
-                  <a:lnTo>
-                    <a:pt x="6589272" y="2405642"/>
-                  </a:lnTo>
-                  <a:lnTo>
-                    <a:pt x="6660894" y="2411123"/>
-                  </a:lnTo>
-                  <a:lnTo>
-                    <a:pt x="6732517" y="2416537"/>
-                  </a:lnTo>
-                  <a:lnTo>
-                    <a:pt x="6804139" y="2421886"/>
-                  </a:lnTo>
-                  <a:lnTo>
-                    <a:pt x="6875762" y="2427170"/>
-                  </a:lnTo>
-                  <a:lnTo>
-                    <a:pt x="6947385" y="2432390"/>
-                  </a:lnTo>
-                  <a:lnTo>
-                    <a:pt x="7019007" y="2437547"/>
-                  </a:lnTo>
-                  <a:lnTo>
-                    <a:pt x="7090630" y="2442642"/>
-                  </a:lnTo>
-                  <a:lnTo>
-                    <a:pt x="7090630" y="2700903"/>
-                  </a:lnTo>
-                  <a:lnTo>
-                    <a:pt x="7019007" y="2696203"/>
-                  </a:lnTo>
-                  <a:lnTo>
-                    <a:pt x="6947385" y="2691363"/>
-                  </a:lnTo>
-                  <a:lnTo>
-                    <a:pt x="6875762" y="2686381"/>
-                  </a:lnTo>
-                  <a:lnTo>
-                    <a:pt x="6804139" y="2681250"/>
-                  </a:lnTo>
-                  <a:lnTo>
-                    <a:pt x="6732517" y="2675967"/>
-                  </a:lnTo>
-                  <a:lnTo>
-                    <a:pt x="6660894" y="2670528"/>
-                  </a:lnTo>
-                  <a:lnTo>
-                    <a:pt x="6589272" y="2664927"/>
-                  </a:lnTo>
-                  <a:lnTo>
-                    <a:pt x="6517649" y="2659160"/>
-                  </a:lnTo>
-                  <a:lnTo>
-                    <a:pt x="6446027" y="2653223"/>
-                  </a:lnTo>
-                  <a:lnTo>
-                    <a:pt x="6374404" y="2647109"/>
-                  </a:lnTo>
-                  <a:lnTo>
-                    <a:pt x="6302782" y="2640814"/>
-                  </a:lnTo>
-                  <a:lnTo>
-                    <a:pt x="6231159" y="2634333"/>
-                  </a:lnTo>
-                  <a:lnTo>
-                    <a:pt x="6159537" y="2627659"/>
-                  </a:lnTo>
-                  <a:lnTo>
-                    <a:pt x="6087914" y="2620787"/>
-                  </a:lnTo>
-                  <a:lnTo>
-                    <a:pt x="6016292" y="2613712"/>
-                  </a:lnTo>
-                  <a:lnTo>
-                    <a:pt x="5944669" y="2606427"/>
-                  </a:lnTo>
-                  <a:lnTo>
-                    <a:pt x="5873047" y="2598926"/>
-                  </a:lnTo>
-                  <a:lnTo>
-                    <a:pt x="5801424" y="2591203"/>
-                  </a:lnTo>
-                  <a:lnTo>
-                    <a:pt x="5729802" y="2583250"/>
-                  </a:lnTo>
-                  <a:lnTo>
-                    <a:pt x="5658179" y="2575062"/>
-                  </a:lnTo>
-                  <a:lnTo>
-                    <a:pt x="5586557" y="2566631"/>
-                  </a:lnTo>
-                  <a:lnTo>
-                    <a:pt x="5514934" y="2557950"/>
-                  </a:lnTo>
-                  <a:lnTo>
-                    <a:pt x="5443311" y="2549012"/>
-                  </a:lnTo>
-                  <a:lnTo>
-                    <a:pt x="5371689" y="2539809"/>
-                  </a:lnTo>
-                  <a:lnTo>
-                    <a:pt x="5300066" y="2530333"/>
-                  </a:lnTo>
-                  <a:lnTo>
-                    <a:pt x="5228444" y="2520576"/>
-                  </a:lnTo>
-                  <a:lnTo>
-                    <a:pt x="5156821" y="2510529"/>
-                  </a:lnTo>
-                  <a:lnTo>
-                    <a:pt x="5085199" y="2500185"/>
-                  </a:lnTo>
-                  <a:lnTo>
-                    <a:pt x="5013576" y="2489534"/>
-                  </a:lnTo>
-                  <a:lnTo>
-                    <a:pt x="4941954" y="2478568"/>
-                  </a:lnTo>
-                  <a:lnTo>
-                    <a:pt x="4870331" y="2467276"/>
-                  </a:lnTo>
-                  <a:lnTo>
-                    <a:pt x="4798709" y="2455649"/>
-                  </a:lnTo>
-                  <a:lnTo>
-                    <a:pt x="4727086" y="2443678"/>
-                  </a:lnTo>
-                  <a:lnTo>
-                    <a:pt x="4655464" y="2431352"/>
-                  </a:lnTo>
-                  <a:lnTo>
-                    <a:pt x="4583841" y="2418661"/>
-                  </a:lnTo>
-                  <a:lnTo>
-                    <a:pt x="4512219" y="2405593"/>
-                  </a:lnTo>
-                  <a:lnTo>
-                    <a:pt x="4440596" y="2392138"/>
-                  </a:lnTo>
-                  <a:lnTo>
-                    <a:pt x="4368974" y="2378283"/>
-                  </a:lnTo>
-                  <a:lnTo>
-                    <a:pt x="4297351" y="2364018"/>
-                  </a:lnTo>
-                  <a:lnTo>
-                    <a:pt x="4225729" y="2349331"/>
-                  </a:lnTo>
-                  <a:lnTo>
-                    <a:pt x="4154106" y="2334207"/>
-                  </a:lnTo>
-                  <a:lnTo>
-                    <a:pt x="4082483" y="2318636"/>
-                  </a:lnTo>
-                  <a:lnTo>
-                    <a:pt x="4010861" y="2302603"/>
-                  </a:lnTo>
-                  <a:lnTo>
-                    <a:pt x="3939238" y="2286094"/>
-                  </a:lnTo>
-                  <a:lnTo>
-                    <a:pt x="3867616" y="2269096"/>
-                  </a:lnTo>
-                  <a:lnTo>
-                    <a:pt x="3795993" y="2251594"/>
-                  </a:lnTo>
-                  <a:lnTo>
-                    <a:pt x="3724371" y="2233573"/>
-                  </a:lnTo>
-                  <a:lnTo>
-                    <a:pt x="3652748" y="2215018"/>
-                  </a:lnTo>
-                  <a:lnTo>
-                    <a:pt x="3581126" y="2195913"/>
-                  </a:lnTo>
-                  <a:lnTo>
-                    <a:pt x="3509503" y="2176241"/>
-                  </a:lnTo>
-                  <a:lnTo>
-                    <a:pt x="3437881" y="2155986"/>
-                  </a:lnTo>
-                  <a:lnTo>
-                    <a:pt x="3366258" y="2135131"/>
-                  </a:lnTo>
-                  <a:lnTo>
-                    <a:pt x="3294636" y="2113657"/>
-                  </a:lnTo>
-                  <a:lnTo>
-                    <a:pt x="3223013" y="2091547"/>
-                  </a:lnTo>
-                  <a:lnTo>
-                    <a:pt x="3151391" y="2068781"/>
-                  </a:lnTo>
-                  <a:lnTo>
-                    <a:pt x="3079768" y="2045340"/>
-                  </a:lnTo>
-                  <a:lnTo>
-                    <a:pt x="3008146" y="2026337"/>
-                  </a:lnTo>
-                  <a:lnTo>
-                    <a:pt x="2936523" y="2016153"/>
-                  </a:lnTo>
-                  <a:lnTo>
-                    <a:pt x="2864901" y="2005845"/>
-                  </a:lnTo>
-                  <a:lnTo>
-                    <a:pt x="2793278" y="1995410"/>
-                  </a:lnTo>
-                  <a:lnTo>
-                    <a:pt x="2721655" y="1984848"/>
-                  </a:lnTo>
-                  <a:lnTo>
-                    <a:pt x="2650033" y="1974157"/>
-                  </a:lnTo>
-                  <a:lnTo>
-                    <a:pt x="2578410" y="1963335"/>
-                  </a:lnTo>
-                  <a:lnTo>
-                    <a:pt x="2506788" y="1952381"/>
-                  </a:lnTo>
-                  <a:lnTo>
-                    <a:pt x="2435165" y="1941293"/>
-                  </a:lnTo>
-                  <a:lnTo>
-                    <a:pt x="2363543" y="1930069"/>
-                  </a:lnTo>
-                  <a:lnTo>
-                    <a:pt x="2291920" y="1918708"/>
-                  </a:lnTo>
-                  <a:lnTo>
-                    <a:pt x="2220298" y="1907209"/>
-                  </a:lnTo>
-                  <a:lnTo>
-                    <a:pt x="2148675" y="1895568"/>
-                  </a:lnTo>
-                  <a:lnTo>
-                    <a:pt x="2077053" y="1883786"/>
-                  </a:lnTo>
-                  <a:lnTo>
-                    <a:pt x="2005430" y="1871859"/>
-                  </a:lnTo>
-                  <a:lnTo>
-                    <a:pt x="1933808" y="1859787"/>
-                  </a:lnTo>
-                  <a:lnTo>
-                    <a:pt x="1862185" y="1847567"/>
-                  </a:lnTo>
-                  <a:lnTo>
-                    <a:pt x="1790563" y="1835197"/>
-                  </a:lnTo>
-                  <a:lnTo>
-                    <a:pt x="1718940" y="1822677"/>
-                  </a:lnTo>
-                  <a:lnTo>
-                    <a:pt x="1647318" y="1810003"/>
-                  </a:lnTo>
-                  <a:lnTo>
-                    <a:pt x="1575695" y="1797174"/>
-                  </a:lnTo>
-                  <a:lnTo>
-                    <a:pt x="1504073" y="1784189"/>
-                  </a:lnTo>
-                  <a:lnTo>
-                    <a:pt x="1432450" y="1771045"/>
-                  </a:lnTo>
-                  <a:lnTo>
-                    <a:pt x="1360827" y="1757740"/>
-                  </a:lnTo>
-                  <a:lnTo>
-                    <a:pt x="1289205" y="1744273"/>
-                  </a:lnTo>
-                  <a:lnTo>
-                    <a:pt x="1217582" y="1730640"/>
-                  </a:lnTo>
-                  <a:lnTo>
-                    <a:pt x="1145960" y="1716842"/>
-                  </a:lnTo>
-                  <a:lnTo>
-                    <a:pt x="1074337" y="1702874"/>
-                  </a:lnTo>
-                  <a:lnTo>
-                    <a:pt x="1002715" y="1688736"/>
-                  </a:lnTo>
-                  <a:lnTo>
-                    <a:pt x="931092" y="1674425"/>
-                  </a:lnTo>
-                  <a:lnTo>
-                    <a:pt x="859470" y="1659939"/>
-                  </a:lnTo>
-                  <a:lnTo>
-                    <a:pt x="787847" y="1645276"/>
-                  </a:lnTo>
-                  <a:lnTo>
-                    <a:pt x="716225" y="1630434"/>
-                  </a:lnTo>
-                  <a:lnTo>
-                    <a:pt x="644602" y="1615410"/>
-                  </a:lnTo>
-                  <a:lnTo>
-                    <a:pt x="572980" y="1600203"/>
-                  </a:lnTo>
-                  <a:lnTo>
-                    <a:pt x="501357" y="1584810"/>
-                  </a:lnTo>
-                  <a:lnTo>
-                    <a:pt x="429735" y="1569228"/>
-                  </a:lnTo>
-                  <a:lnTo>
-                    <a:pt x="358112" y="1553456"/>
-                  </a:lnTo>
-                  <a:lnTo>
-                    <a:pt x="286490" y="1537492"/>
-                  </a:lnTo>
-                  <a:lnTo>
-                    <a:pt x="214867" y="1521332"/>
-                  </a:lnTo>
-                  <a:lnTo>
-                    <a:pt x="143245" y="1504975"/>
-                  </a:lnTo>
-                  <a:lnTo>
-                    <a:pt x="71622" y="1488417"/>
-                  </a:lnTo>
-                  <a:lnTo>
-                    <a:pt x="0" y="1471658"/>
+                    <a:pt x="71622" y="83050"/>
+                  </a:lnTo>
+                  <a:lnTo>
+                    <a:pt x="143245" y="163699"/>
+                  </a:lnTo>
+                  <a:lnTo>
+                    <a:pt x="214867" y="242018"/>
+                  </a:lnTo>
+                  <a:lnTo>
+                    <a:pt x="286490" y="318073"/>
+                  </a:lnTo>
+                  <a:lnTo>
+                    <a:pt x="358112" y="391929"/>
+                  </a:lnTo>
+                  <a:lnTo>
+                    <a:pt x="429735" y="463651"/>
+                  </a:lnTo>
+                  <a:lnTo>
+                    <a:pt x="501357" y="533300"/>
+                  </a:lnTo>
+                  <a:lnTo>
+                    <a:pt x="572980" y="600935"/>
+                  </a:lnTo>
+                  <a:lnTo>
+                    <a:pt x="644602" y="666616"/>
+                  </a:lnTo>
+                  <a:lnTo>
+                    <a:pt x="716225" y="730398"/>
+                  </a:lnTo>
+                  <a:lnTo>
+                    <a:pt x="787847" y="792336"/>
+                  </a:lnTo>
+                  <a:lnTo>
+                    <a:pt x="859470" y="852484"/>
+                  </a:lnTo>
+                  <a:lnTo>
+                    <a:pt x="931092" y="910894"/>
+                  </a:lnTo>
+                  <a:lnTo>
+                    <a:pt x="1002715" y="967616"/>
+                  </a:lnTo>
+                  <a:lnTo>
+                    <a:pt x="1074337" y="1022697"/>
+                  </a:lnTo>
+                  <a:lnTo>
+                    <a:pt x="1145960" y="1076187"/>
+                  </a:lnTo>
+                  <a:lnTo>
+                    <a:pt x="1217582" y="1128131"/>
+                  </a:lnTo>
+                  <a:lnTo>
+                    <a:pt x="1289205" y="1178573"/>
+                  </a:lnTo>
+                  <a:lnTo>
+                    <a:pt x="1360827" y="1227558"/>
+                  </a:lnTo>
+                  <a:lnTo>
+                    <a:pt x="1432450" y="1275126"/>
+                  </a:lnTo>
+                  <a:lnTo>
+                    <a:pt x="1504073" y="1321319"/>
+                  </a:lnTo>
+                  <a:lnTo>
+                    <a:pt x="1575695" y="1366178"/>
+                  </a:lnTo>
+                  <a:lnTo>
+                    <a:pt x="1647318" y="1409740"/>
+                  </a:lnTo>
+                  <a:lnTo>
+                    <a:pt x="1718940" y="1452042"/>
+                  </a:lnTo>
+                  <a:lnTo>
+                    <a:pt x="1790563" y="1493122"/>
+                  </a:lnTo>
+                  <a:lnTo>
+                    <a:pt x="1862185" y="1533014"/>
+                  </a:lnTo>
+                  <a:lnTo>
+                    <a:pt x="1933808" y="1571754"/>
+                  </a:lnTo>
+                  <a:lnTo>
+                    <a:pt x="2005430" y="1609374"/>
+                  </a:lnTo>
+                  <a:lnTo>
+                    <a:pt x="2077053" y="1645906"/>
+                  </a:lnTo>
+                  <a:lnTo>
+                    <a:pt x="2148675" y="1681382"/>
+                  </a:lnTo>
+                  <a:lnTo>
+                    <a:pt x="2220298" y="1715833"/>
+                  </a:lnTo>
+                  <a:lnTo>
+                    <a:pt x="2291920" y="1749288"/>
+                  </a:lnTo>
+                  <a:lnTo>
+                    <a:pt x="2363543" y="1781776"/>
+                  </a:lnTo>
+                  <a:lnTo>
+                    <a:pt x="2435165" y="1813326"/>
+                  </a:lnTo>
+                  <a:lnTo>
+                    <a:pt x="2506788" y="1843963"/>
+                  </a:lnTo>
+                  <a:lnTo>
+                    <a:pt x="2578410" y="1873714"/>
+                  </a:lnTo>
+                  <a:lnTo>
+                    <a:pt x="2650033" y="1902606"/>
+                  </a:lnTo>
+                  <a:lnTo>
+                    <a:pt x="2721655" y="1930663"/>
+                  </a:lnTo>
+                  <a:lnTo>
+                    <a:pt x="2793278" y="1957908"/>
+                  </a:lnTo>
+                  <a:lnTo>
+                    <a:pt x="2864901" y="1984367"/>
+                  </a:lnTo>
+                  <a:lnTo>
+                    <a:pt x="2936523" y="2010060"/>
+                  </a:lnTo>
+                  <a:lnTo>
+                    <a:pt x="3008146" y="2035011"/>
+                  </a:lnTo>
+                  <a:lnTo>
+                    <a:pt x="3079768" y="2050299"/>
+                  </a:lnTo>
+                  <a:lnTo>
+                    <a:pt x="3151391" y="2060329"/>
+                  </a:lnTo>
+                  <a:lnTo>
+                    <a:pt x="3223013" y="2070237"/>
+                  </a:lnTo>
+                  <a:lnTo>
+                    <a:pt x="3294636" y="2080024"/>
+                  </a:lnTo>
+                  <a:lnTo>
+                    <a:pt x="3366258" y="2089692"/>
+                  </a:lnTo>
+                  <a:lnTo>
+                    <a:pt x="3437881" y="2099242"/>
+                  </a:lnTo>
+                  <a:lnTo>
+                    <a:pt x="3509503" y="2108676"/>
+                  </a:lnTo>
+                  <a:lnTo>
+                    <a:pt x="3581126" y="2117995"/>
+                  </a:lnTo>
+                  <a:lnTo>
+                    <a:pt x="3652748" y="2127200"/>
+                  </a:lnTo>
+                  <a:lnTo>
+                    <a:pt x="3724371" y="2136293"/>
+                  </a:lnTo>
+                  <a:lnTo>
+                    <a:pt x="3795993" y="2145275"/>
+                  </a:lnTo>
+                  <a:lnTo>
+                    <a:pt x="3867616" y="2154148"/>
+                  </a:lnTo>
+                  <a:lnTo>
+                    <a:pt x="3939238" y="2162912"/>
+                  </a:lnTo>
+                  <a:lnTo>
+                    <a:pt x="4010861" y="2171570"/>
+                  </a:lnTo>
+                  <a:lnTo>
+                    <a:pt x="4082483" y="2180122"/>
+                  </a:lnTo>
+                  <a:lnTo>
+                    <a:pt x="4154106" y="2188570"/>
+                  </a:lnTo>
+                  <a:lnTo>
+                    <a:pt x="4225729" y="2196915"/>
+                  </a:lnTo>
+                  <a:lnTo>
+                    <a:pt x="4297351" y="2205159"/>
+                  </a:lnTo>
+                  <a:lnTo>
+                    <a:pt x="4368974" y="2213302"/>
+                  </a:lnTo>
+                  <a:lnTo>
+                    <a:pt x="4440596" y="2221345"/>
+                  </a:lnTo>
+                  <a:lnTo>
+                    <a:pt x="4512219" y="2229291"/>
+                  </a:lnTo>
+                  <a:lnTo>
+                    <a:pt x="4583841" y="2237139"/>
+                  </a:lnTo>
+                  <a:lnTo>
+                    <a:pt x="4655464" y="2244893"/>
+                  </a:lnTo>
+                  <a:lnTo>
+                    <a:pt x="4727086" y="2252551"/>
+                  </a:lnTo>
+                  <a:lnTo>
+                    <a:pt x="4798709" y="2260116"/>
+                  </a:lnTo>
+                  <a:lnTo>
+                    <a:pt x="4870331" y="2267589"/>
+                  </a:lnTo>
+                  <a:lnTo>
+                    <a:pt x="4941954" y="2274971"/>
+                  </a:lnTo>
+                  <a:lnTo>
+                    <a:pt x="5013576" y="2282263"/>
+                  </a:lnTo>
+                  <a:lnTo>
+                    <a:pt x="5085199" y="2289467"/>
+                  </a:lnTo>
+                  <a:lnTo>
+                    <a:pt x="5156821" y="2296582"/>
+                  </a:lnTo>
+                  <a:lnTo>
+                    <a:pt x="5228444" y="2303610"/>
+                  </a:lnTo>
+                  <a:lnTo>
+                    <a:pt x="5300066" y="2310553"/>
+                  </a:lnTo>
+                  <a:lnTo>
+                    <a:pt x="5371689" y="2317412"/>
+                  </a:lnTo>
+                  <a:lnTo>
+                    <a:pt x="5443311" y="2324187"/>
+                  </a:lnTo>
+                  <a:lnTo>
+                    <a:pt x="5514934" y="2330879"/>
+                  </a:lnTo>
+                  <a:lnTo>
+                    <a:pt x="5586557" y="2337489"/>
+                  </a:lnTo>
+                  <a:lnTo>
+                    <a:pt x="5658179" y="2344019"/>
+                  </a:lnTo>
+                  <a:lnTo>
+                    <a:pt x="5729802" y="2350470"/>
+                  </a:lnTo>
+                  <a:lnTo>
+                    <a:pt x="5801424" y="2356842"/>
+                  </a:lnTo>
+                  <a:lnTo>
+                    <a:pt x="5873047" y="2363136"/>
+                  </a:lnTo>
+                  <a:lnTo>
+                    <a:pt x="5944669" y="2369353"/>
+                  </a:lnTo>
+                  <a:lnTo>
+                    <a:pt x="6016292" y="2375495"/>
+                  </a:lnTo>
+                  <a:lnTo>
+                    <a:pt x="6087914" y="2381562"/>
+                  </a:lnTo>
+                  <a:lnTo>
+                    <a:pt x="6159537" y="2387555"/>
+                  </a:lnTo>
+                  <a:lnTo>
+                    <a:pt x="6231159" y="2393475"/>
+                  </a:lnTo>
+                  <a:lnTo>
+                    <a:pt x="6302782" y="2399322"/>
+                  </a:lnTo>
+                  <a:lnTo>
+                    <a:pt x="6374404" y="2405099"/>
+                  </a:lnTo>
+                  <a:lnTo>
+                    <a:pt x="6446027" y="2410805"/>
+                  </a:lnTo>
+                  <a:lnTo>
+                    <a:pt x="6517649" y="2416441"/>
+                  </a:lnTo>
+                  <a:lnTo>
+                    <a:pt x="6589272" y="2422009"/>
+                  </a:lnTo>
+                  <a:lnTo>
+                    <a:pt x="6660894" y="2427509"/>
+                  </a:lnTo>
+                  <a:lnTo>
+                    <a:pt x="6732517" y="2432942"/>
+                  </a:lnTo>
+                  <a:lnTo>
+                    <a:pt x="6804139" y="2438309"/>
+                  </a:lnTo>
+                  <a:lnTo>
+                    <a:pt x="6875762" y="2443610"/>
+                  </a:lnTo>
+                  <a:lnTo>
+                    <a:pt x="6947385" y="2448847"/>
+                  </a:lnTo>
+                  <a:lnTo>
+                    <a:pt x="7019007" y="2454019"/>
+                  </a:lnTo>
+                  <a:lnTo>
+                    <a:pt x="7090630" y="2459129"/>
+                  </a:lnTo>
+                  <a:lnTo>
+                    <a:pt x="7090630" y="2715764"/>
+                  </a:lnTo>
+                  <a:lnTo>
+                    <a:pt x="7019007" y="2711076"/>
+                  </a:lnTo>
+                  <a:lnTo>
+                    <a:pt x="6947385" y="2706248"/>
+                  </a:lnTo>
+                  <a:lnTo>
+                    <a:pt x="6875762" y="2701276"/>
+                  </a:lnTo>
+                  <a:lnTo>
+                    <a:pt x="6804139" y="2696157"/>
+                  </a:lnTo>
+                  <a:lnTo>
+                    <a:pt x="6732517" y="2690885"/>
+                  </a:lnTo>
+                  <a:lnTo>
+                    <a:pt x="6660894" y="2685456"/>
+                  </a:lnTo>
+                  <a:lnTo>
+                    <a:pt x="6589272" y="2679866"/>
+                  </a:lnTo>
+                  <a:lnTo>
+                    <a:pt x="6517649" y="2674109"/>
+                  </a:lnTo>
+                  <a:lnTo>
+                    <a:pt x="6446027" y="2668181"/>
+                  </a:lnTo>
+                  <a:lnTo>
+                    <a:pt x="6374404" y="2662076"/>
+                  </a:lnTo>
+                  <a:lnTo>
+                    <a:pt x="6302782" y="2655790"/>
+                  </a:lnTo>
+                  <a:lnTo>
+                    <a:pt x="6231159" y="2649316"/>
+                  </a:lnTo>
+                  <a:lnTo>
+                    <a:pt x="6159537" y="2642650"/>
+                  </a:lnTo>
+                  <a:lnTo>
+                    <a:pt x="6087914" y="2635785"/>
+                  </a:lnTo>
+                  <a:lnTo>
+                    <a:pt x="6016292" y="2628717"/>
+                  </a:lnTo>
+                  <a:lnTo>
+                    <a:pt x="5944669" y="2621437"/>
+                  </a:lnTo>
+                  <a:lnTo>
+                    <a:pt x="5873047" y="2613941"/>
+                  </a:lnTo>
+                  <a:lnTo>
+                    <a:pt x="5801424" y="2606222"/>
+                  </a:lnTo>
+                  <a:lnTo>
+                    <a:pt x="5729802" y="2598273"/>
+                  </a:lnTo>
+                  <a:lnTo>
+                    <a:pt x="5658179" y="2590088"/>
+                  </a:lnTo>
+                  <a:lnTo>
+                    <a:pt x="5586557" y="2581659"/>
+                  </a:lnTo>
+                  <a:lnTo>
+                    <a:pt x="5514934" y="2572979"/>
+                  </a:lnTo>
+                  <a:lnTo>
+                    <a:pt x="5443311" y="2564041"/>
+                  </a:lnTo>
+                  <a:lnTo>
+                    <a:pt x="5371689" y="2554837"/>
+                  </a:lnTo>
+                  <a:lnTo>
+                    <a:pt x="5300066" y="2545358"/>
+                  </a:lnTo>
+                  <a:lnTo>
+                    <a:pt x="5228444" y="2535598"/>
+                  </a:lnTo>
+                  <a:lnTo>
+                    <a:pt x="5156821" y="2525547"/>
+                  </a:lnTo>
+                  <a:lnTo>
+                    <a:pt x="5085199" y="2515197"/>
+                  </a:lnTo>
+                  <a:lnTo>
+                    <a:pt x="5013576" y="2504539"/>
+                  </a:lnTo>
+                  <a:lnTo>
+                    <a:pt x="4941954" y="2493563"/>
+                  </a:lnTo>
+                  <a:lnTo>
+                    <a:pt x="4870331" y="2482261"/>
+                  </a:lnTo>
+                  <a:lnTo>
+                    <a:pt x="4798709" y="2470623"/>
+                  </a:lnTo>
+                  <a:lnTo>
+                    <a:pt x="4727086" y="2458638"/>
+                  </a:lnTo>
+                  <a:lnTo>
+                    <a:pt x="4655464" y="2446296"/>
+                  </a:lnTo>
+                  <a:lnTo>
+                    <a:pt x="4583841" y="2433587"/>
+                  </a:lnTo>
+                  <a:lnTo>
+                    <a:pt x="4512219" y="2420500"/>
+                  </a:lnTo>
+                  <a:lnTo>
+                    <a:pt x="4440596" y="2407023"/>
+                  </a:lnTo>
+                  <a:lnTo>
+                    <a:pt x="4368974" y="2393146"/>
+                  </a:lnTo>
+                  <a:lnTo>
+                    <a:pt x="4297351" y="2378855"/>
+                  </a:lnTo>
+                  <a:lnTo>
+                    <a:pt x="4225729" y="2364138"/>
+                  </a:lnTo>
+                  <a:lnTo>
+                    <a:pt x="4154106" y="2348984"/>
+                  </a:lnTo>
+                  <a:lnTo>
+                    <a:pt x="4082483" y="2333378"/>
+                  </a:lnTo>
+                  <a:lnTo>
+                    <a:pt x="4010861" y="2317309"/>
+                  </a:lnTo>
+                  <a:lnTo>
+                    <a:pt x="3939238" y="2300760"/>
+                  </a:lnTo>
+                  <a:lnTo>
+                    <a:pt x="3867616" y="2283720"/>
+                  </a:lnTo>
+                  <a:lnTo>
+                    <a:pt x="3795993" y="2266172"/>
+                  </a:lnTo>
+                  <a:lnTo>
+                    <a:pt x="3724371" y="2248101"/>
+                  </a:lnTo>
+                  <a:lnTo>
+                    <a:pt x="3652748" y="2229493"/>
+                  </a:lnTo>
+                  <a:lnTo>
+                    <a:pt x="3581126" y="2210331"/>
+                  </a:lnTo>
+                  <a:lnTo>
+                    <a:pt x="3509503" y="2190599"/>
+                  </a:lnTo>
+                  <a:lnTo>
+                    <a:pt x="3437881" y="2170279"/>
+                  </a:lnTo>
+                  <a:lnTo>
+                    <a:pt x="3366258" y="2149354"/>
+                  </a:lnTo>
+                  <a:lnTo>
+                    <a:pt x="3294636" y="2127807"/>
+                  </a:lnTo>
+                  <a:lnTo>
+                    <a:pt x="3223013" y="2105618"/>
+                  </a:lnTo>
+                  <a:lnTo>
+                    <a:pt x="3151391" y="2082769"/>
+                  </a:lnTo>
+                  <a:lnTo>
+                    <a:pt x="3079768" y="2059240"/>
+                  </a:lnTo>
+                  <a:lnTo>
+                    <a:pt x="3008146" y="2040145"/>
+                  </a:lnTo>
+                  <a:lnTo>
+                    <a:pt x="2936523" y="2029865"/>
+                  </a:lnTo>
+                  <a:lnTo>
+                    <a:pt x="2864901" y="2019459"/>
+                  </a:lnTo>
+                  <a:lnTo>
+                    <a:pt x="2793278" y="2008925"/>
+                  </a:lnTo>
+                  <a:lnTo>
+                    <a:pt x="2721655" y="1998260"/>
+                  </a:lnTo>
+                  <a:lnTo>
+                    <a:pt x="2650033" y="1987464"/>
+                  </a:lnTo>
+                  <a:lnTo>
+                    <a:pt x="2578410" y="1976535"/>
+                  </a:lnTo>
+                  <a:lnTo>
+                    <a:pt x="2506788" y="1965471"/>
+                  </a:lnTo>
+                  <a:lnTo>
+                    <a:pt x="2435165" y="1954270"/>
+                  </a:lnTo>
+                  <a:lnTo>
+                    <a:pt x="2363543" y="1942931"/>
+                  </a:lnTo>
+                  <a:lnTo>
+                    <a:pt x="2291920" y="1931453"/>
+                  </a:lnTo>
+                  <a:lnTo>
+                    <a:pt x="2220298" y="1919832"/>
+                  </a:lnTo>
+                  <a:lnTo>
+                    <a:pt x="2148675" y="1908069"/>
+                  </a:lnTo>
+                  <a:lnTo>
+                    <a:pt x="2077053" y="1896160"/>
+                  </a:lnTo>
+                  <a:lnTo>
+                    <a:pt x="2005430" y="1884104"/>
+                  </a:lnTo>
+                  <a:lnTo>
+                    <a:pt x="1933808" y="1871899"/>
+                  </a:lnTo>
+                  <a:lnTo>
+                    <a:pt x="1862185" y="1859544"/>
+                  </a:lnTo>
+                  <a:lnTo>
+                    <a:pt x="1790563" y="1847037"/>
+                  </a:lnTo>
+                  <a:lnTo>
+                    <a:pt x="1718940" y="1834375"/>
+                  </a:lnTo>
+                  <a:lnTo>
+                    <a:pt x="1647318" y="1821557"/>
+                  </a:lnTo>
+                  <a:lnTo>
+                    <a:pt x="1575695" y="1808580"/>
+                  </a:lnTo>
+                  <a:lnTo>
+                    <a:pt x="1504073" y="1795444"/>
+                  </a:lnTo>
+                  <a:lnTo>
+                    <a:pt x="1432450" y="1782146"/>
+                  </a:lnTo>
+                  <a:lnTo>
+                    <a:pt x="1360827" y="1768683"/>
+                  </a:lnTo>
+                  <a:lnTo>
+                    <a:pt x="1289205" y="1755055"/>
+                  </a:lnTo>
+                  <a:lnTo>
+                    <a:pt x="1217582" y="1741258"/>
+                  </a:lnTo>
+                  <a:lnTo>
+                    <a:pt x="1145960" y="1727291"/>
+                  </a:lnTo>
+                  <a:lnTo>
+                    <a:pt x="1074337" y="1713151"/>
+                  </a:lnTo>
+                  <a:lnTo>
+                    <a:pt x="1002715" y="1698838"/>
+                  </a:lnTo>
+                  <a:lnTo>
+                    <a:pt x="931092" y="1684347"/>
+                  </a:lnTo>
+                  <a:lnTo>
+                    <a:pt x="859470" y="1669678"/>
+                  </a:lnTo>
+                  <a:lnTo>
+                    <a:pt x="787847" y="1654828"/>
+                  </a:lnTo>
+                  <a:lnTo>
+                    <a:pt x="716225" y="1639795"/>
+                  </a:lnTo>
+                  <a:lnTo>
+                    <a:pt x="644602" y="1624576"/>
+                  </a:lnTo>
+                  <a:lnTo>
+                    <a:pt x="572980" y="1609169"/>
+                  </a:lnTo>
+                  <a:lnTo>
+                    <a:pt x="501357" y="1593573"/>
+                  </a:lnTo>
+                  <a:lnTo>
+                    <a:pt x="429735" y="1577783"/>
+                  </a:lnTo>
+                  <a:lnTo>
+                    <a:pt x="358112" y="1561799"/>
+                  </a:lnTo>
+                  <a:lnTo>
+                    <a:pt x="286490" y="1545618"/>
+                  </a:lnTo>
+                  <a:lnTo>
+                    <a:pt x="214867" y="1529237"/>
+                  </a:lnTo>
+                  <a:lnTo>
+                    <a:pt x="143245" y="1512654"/>
+                  </a:lnTo>
+                  <a:lnTo>
+                    <a:pt x="71622" y="1495867"/>
+                  </a:lnTo>
+                  <a:lnTo>
+                    <a:pt x="0" y="1478872"/>
                   </a:lnTo>
                   <a:close/>
                 </a:path>
@@ -3676,312 +3676,312 @@
           </p:nvSpPr>
           <p:spPr>
             <a:xfrm>
-              <a:off x="1172049" y="2697812"/>
-              <a:ext cx="7090630" cy="2442642"/>
+              <a:off x="1172049" y="2683972"/>
+              <a:ext cx="7090630" cy="2459129"/>
             </a:xfrm>
             <a:custGeom>
               <a:avLst/>
               <a:pathLst>
-                <a:path w="7090630" h="2442642">
+                <a:path w="7090630" h="2459129">
                   <a:moveTo>
                     <a:pt x="0" y="0"/>
                   </a:moveTo>
                   <a:lnTo>
-                    <a:pt x="71622" y="82333"/>
-                  </a:lnTo>
-                  <a:lnTo>
-                    <a:pt x="143245" y="162296"/>
-                  </a:lnTo>
-                  <a:lnTo>
-                    <a:pt x="214867" y="239956"/>
-                  </a:lnTo>
-                  <a:lnTo>
-                    <a:pt x="286490" y="315381"/>
-                  </a:lnTo>
-                  <a:lnTo>
-                    <a:pt x="358112" y="388633"/>
-                  </a:lnTo>
-                  <a:lnTo>
-                    <a:pt x="429735" y="459777"/>
-                  </a:lnTo>
-                  <a:lnTo>
-                    <a:pt x="501357" y="528872"/>
-                  </a:lnTo>
-                  <a:lnTo>
-                    <a:pt x="572980" y="595977"/>
-                  </a:lnTo>
-                  <a:lnTo>
-                    <a:pt x="644602" y="661150"/>
-                  </a:lnTo>
-                  <a:lnTo>
-                    <a:pt x="716225" y="724447"/>
-                  </a:lnTo>
-                  <a:lnTo>
-                    <a:pt x="787847" y="785921"/>
-                  </a:lnTo>
-                  <a:lnTo>
-                    <a:pt x="859470" y="845625"/>
-                  </a:lnTo>
-                  <a:lnTo>
-                    <a:pt x="931092" y="903610"/>
-                  </a:lnTo>
-                  <a:lnTo>
-                    <a:pt x="1002715" y="959925"/>
-                  </a:lnTo>
-                  <a:lnTo>
-                    <a:pt x="1074337" y="1014619"/>
-                  </a:lnTo>
-                  <a:lnTo>
-                    <a:pt x="1145960" y="1067738"/>
-                  </a:lnTo>
-                  <a:lnTo>
-                    <a:pt x="1217582" y="1119328"/>
-                  </a:lnTo>
-                  <a:lnTo>
-                    <a:pt x="1289205" y="1169432"/>
-                  </a:lnTo>
-                  <a:lnTo>
-                    <a:pt x="1360827" y="1218093"/>
-                  </a:lnTo>
-                  <a:lnTo>
-                    <a:pt x="1432450" y="1265353"/>
-                  </a:lnTo>
-                  <a:lnTo>
-                    <a:pt x="1504073" y="1311253"/>
-                  </a:lnTo>
-                  <a:lnTo>
-                    <a:pt x="1575695" y="1355831"/>
-                  </a:lnTo>
-                  <a:lnTo>
-                    <a:pt x="1647318" y="1399125"/>
-                  </a:lnTo>
-                  <a:lnTo>
-                    <a:pt x="1718940" y="1441173"/>
-                  </a:lnTo>
-                  <a:lnTo>
-                    <a:pt x="1790563" y="1482010"/>
-                  </a:lnTo>
-                  <a:lnTo>
-                    <a:pt x="1862185" y="1521671"/>
-                  </a:lnTo>
-                  <a:lnTo>
-                    <a:pt x="1933808" y="1560190"/>
-                  </a:lnTo>
-                  <a:lnTo>
-                    <a:pt x="2005430" y="1597600"/>
-                  </a:lnTo>
-                  <a:lnTo>
-                    <a:pt x="2077053" y="1633933"/>
-                  </a:lnTo>
-                  <a:lnTo>
-                    <a:pt x="2148675" y="1669219"/>
-                  </a:lnTo>
-                  <a:lnTo>
-                    <a:pt x="2220298" y="1703490"/>
-                  </a:lnTo>
-                  <a:lnTo>
-                    <a:pt x="2291920" y="1736774"/>
-                  </a:lnTo>
-                  <a:lnTo>
-                    <a:pt x="2363543" y="1769100"/>
-                  </a:lnTo>
-                  <a:lnTo>
-                    <a:pt x="2435165" y="1800494"/>
-                  </a:lnTo>
-                  <a:lnTo>
-                    <a:pt x="2506788" y="1830985"/>
-                  </a:lnTo>
-                  <a:lnTo>
-                    <a:pt x="2578410" y="1860598"/>
-                  </a:lnTo>
-                  <a:lnTo>
-                    <a:pt x="2650033" y="1889358"/>
-                  </a:lnTo>
-                  <a:lnTo>
-                    <a:pt x="2721655" y="1917290"/>
-                  </a:lnTo>
-                  <a:lnTo>
-                    <a:pt x="2793278" y="1944418"/>
-                  </a:lnTo>
-                  <a:lnTo>
-                    <a:pt x="2864901" y="1970765"/>
-                  </a:lnTo>
-                  <a:lnTo>
-                    <a:pt x="2936523" y="1996353"/>
-                  </a:lnTo>
-                  <a:lnTo>
-                    <a:pt x="3008146" y="2021204"/>
-                  </a:lnTo>
-                  <a:lnTo>
-                    <a:pt x="3079768" y="2036399"/>
-                  </a:lnTo>
-                  <a:lnTo>
-                    <a:pt x="3151391" y="2046338"/>
-                  </a:lnTo>
-                  <a:lnTo>
-                    <a:pt x="3223013" y="2056158"/>
-                  </a:lnTo>
-                  <a:lnTo>
-                    <a:pt x="3294636" y="2065859"/>
-                  </a:lnTo>
-                  <a:lnTo>
-                    <a:pt x="3366258" y="2075442"/>
-                  </a:lnTo>
-                  <a:lnTo>
-                    <a:pt x="3437881" y="2084910"/>
-                  </a:lnTo>
-                  <a:lnTo>
-                    <a:pt x="3509503" y="2094264"/>
-                  </a:lnTo>
-                  <a:lnTo>
-                    <a:pt x="3581126" y="2103505"/>
-                  </a:lnTo>
-                  <a:lnTo>
-                    <a:pt x="3652748" y="2112634"/>
-                  </a:lnTo>
-                  <a:lnTo>
-                    <a:pt x="3724371" y="2121653"/>
-                  </a:lnTo>
-                  <a:lnTo>
-                    <a:pt x="3795993" y="2130563"/>
-                  </a:lnTo>
-                  <a:lnTo>
-                    <a:pt x="3867616" y="2139365"/>
-                  </a:lnTo>
-                  <a:lnTo>
-                    <a:pt x="3939238" y="2148061"/>
-                  </a:lnTo>
-                  <a:lnTo>
-                    <a:pt x="4010861" y="2156652"/>
-                  </a:lnTo>
-                  <a:lnTo>
-                    <a:pt x="4082483" y="2165139"/>
-                  </a:lnTo>
-                  <a:lnTo>
-                    <a:pt x="4154106" y="2173524"/>
-                  </a:lnTo>
-                  <a:lnTo>
-                    <a:pt x="4225729" y="2181808"/>
-                  </a:lnTo>
-                  <a:lnTo>
-                    <a:pt x="4297351" y="2189991"/>
-                  </a:lnTo>
-                  <a:lnTo>
-                    <a:pt x="4368974" y="2198076"/>
-                  </a:lnTo>
-                  <a:lnTo>
-                    <a:pt x="4440596" y="2206063"/>
-                  </a:lnTo>
-                  <a:lnTo>
-                    <a:pt x="4512219" y="2213954"/>
-                  </a:lnTo>
-                  <a:lnTo>
-                    <a:pt x="4583841" y="2221749"/>
-                  </a:lnTo>
-                  <a:lnTo>
-                    <a:pt x="4655464" y="2229450"/>
-                  </a:lnTo>
-                  <a:lnTo>
-                    <a:pt x="4727086" y="2237058"/>
-                  </a:lnTo>
-                  <a:lnTo>
-                    <a:pt x="4798709" y="2244574"/>
-                  </a:lnTo>
-                  <a:lnTo>
-                    <a:pt x="4870331" y="2252000"/>
-                  </a:lnTo>
-                  <a:lnTo>
-                    <a:pt x="4941954" y="2259336"/>
-                  </a:lnTo>
-                  <a:lnTo>
-                    <a:pt x="5013576" y="2266583"/>
-                  </a:lnTo>
-                  <a:lnTo>
-                    <a:pt x="5085199" y="2273743"/>
-                  </a:lnTo>
-                  <a:lnTo>
-                    <a:pt x="5156821" y="2280816"/>
-                  </a:lnTo>
-                  <a:lnTo>
-                    <a:pt x="5228444" y="2287804"/>
-                  </a:lnTo>
-                  <a:lnTo>
-                    <a:pt x="5300066" y="2294707"/>
-                  </a:lnTo>
-                  <a:lnTo>
-                    <a:pt x="5371689" y="2301527"/>
-                  </a:lnTo>
-                  <a:lnTo>
-                    <a:pt x="5443311" y="2308265"/>
-                  </a:lnTo>
-                  <a:lnTo>
-                    <a:pt x="5514934" y="2314921"/>
-                  </a:lnTo>
-                  <a:lnTo>
-                    <a:pt x="5586557" y="2321497"/>
-                  </a:lnTo>
-                  <a:lnTo>
-                    <a:pt x="5658179" y="2327993"/>
-                  </a:lnTo>
-                  <a:lnTo>
-                    <a:pt x="5729802" y="2334412"/>
-                  </a:lnTo>
-                  <a:lnTo>
-                    <a:pt x="5801424" y="2340752"/>
-                  </a:lnTo>
-                  <a:lnTo>
-                    <a:pt x="5873047" y="2347016"/>
-                  </a:lnTo>
-                  <a:lnTo>
-                    <a:pt x="5944669" y="2353204"/>
-                  </a:lnTo>
-                  <a:lnTo>
-                    <a:pt x="6016292" y="2359318"/>
-                  </a:lnTo>
-                  <a:lnTo>
-                    <a:pt x="6087914" y="2365358"/>
-                  </a:lnTo>
-                  <a:lnTo>
-                    <a:pt x="6159537" y="2371325"/>
-                  </a:lnTo>
-                  <a:lnTo>
-                    <a:pt x="6231159" y="2377219"/>
-                  </a:lnTo>
-                  <a:lnTo>
-                    <a:pt x="6302782" y="2383043"/>
-                  </a:lnTo>
-                  <a:lnTo>
-                    <a:pt x="6374404" y="2388796"/>
-                  </a:lnTo>
-                  <a:lnTo>
-                    <a:pt x="6446027" y="2394480"/>
-                  </a:lnTo>
-                  <a:lnTo>
-                    <a:pt x="6517649" y="2400095"/>
-                  </a:lnTo>
-                  <a:lnTo>
-                    <a:pt x="6589272" y="2405642"/>
-                  </a:lnTo>
-                  <a:lnTo>
-                    <a:pt x="6660894" y="2411123"/>
-                  </a:lnTo>
-                  <a:lnTo>
-                    <a:pt x="6732517" y="2416537"/>
-                  </a:lnTo>
-                  <a:lnTo>
-                    <a:pt x="6804139" y="2421886"/>
-                  </a:lnTo>
-                  <a:lnTo>
-                    <a:pt x="6875762" y="2427170"/>
-                  </a:lnTo>
-                  <a:lnTo>
-                    <a:pt x="6947385" y="2432390"/>
-                  </a:lnTo>
-                  <a:lnTo>
-                    <a:pt x="7019007" y="2437547"/>
-                  </a:lnTo>
-                  <a:lnTo>
-                    <a:pt x="7090630" y="2442642"/>
+                    <a:pt x="71622" y="83050"/>
+                  </a:lnTo>
+                  <a:lnTo>
+                    <a:pt x="143245" y="163699"/>
+                  </a:lnTo>
+                  <a:lnTo>
+                    <a:pt x="214867" y="242018"/>
+                  </a:lnTo>
+                  <a:lnTo>
+                    <a:pt x="286490" y="318073"/>
+                  </a:lnTo>
+                  <a:lnTo>
+                    <a:pt x="358112" y="391929"/>
+                  </a:lnTo>
+                  <a:lnTo>
+                    <a:pt x="429735" y="463651"/>
+                  </a:lnTo>
+                  <a:lnTo>
+                    <a:pt x="501357" y="533300"/>
+                  </a:lnTo>
+                  <a:lnTo>
+                    <a:pt x="572980" y="600935"/>
+                  </a:lnTo>
+                  <a:lnTo>
+                    <a:pt x="644602" y="666616"/>
+                  </a:lnTo>
+                  <a:lnTo>
+                    <a:pt x="716225" y="730398"/>
+                  </a:lnTo>
+                  <a:lnTo>
+                    <a:pt x="787847" y="792336"/>
+                  </a:lnTo>
+                  <a:lnTo>
+                    <a:pt x="859470" y="852484"/>
+                  </a:lnTo>
+                  <a:lnTo>
+                    <a:pt x="931092" y="910894"/>
+                  </a:lnTo>
+                  <a:lnTo>
+                    <a:pt x="1002715" y="967616"/>
+                  </a:lnTo>
+                  <a:lnTo>
+                    <a:pt x="1074337" y="1022697"/>
+                  </a:lnTo>
+                  <a:lnTo>
+                    <a:pt x="1145960" y="1076187"/>
+                  </a:lnTo>
+                  <a:lnTo>
+                    <a:pt x="1217582" y="1128131"/>
+                  </a:lnTo>
+                  <a:lnTo>
+                    <a:pt x="1289205" y="1178573"/>
+                  </a:lnTo>
+                  <a:lnTo>
+                    <a:pt x="1360827" y="1227558"/>
+                  </a:lnTo>
+                  <a:lnTo>
+                    <a:pt x="1432450" y="1275126"/>
+                  </a:lnTo>
+                  <a:lnTo>
+                    <a:pt x="1504073" y="1321319"/>
+                  </a:lnTo>
+                  <a:lnTo>
+                    <a:pt x="1575695" y="1366178"/>
+                  </a:lnTo>
+                  <a:lnTo>
+                    <a:pt x="1647318" y="1409740"/>
+                  </a:lnTo>
+                  <a:lnTo>
+                    <a:pt x="1718940" y="1452042"/>
+                  </a:lnTo>
+                  <a:lnTo>
+                    <a:pt x="1790563" y="1493122"/>
+                  </a:lnTo>
+                  <a:lnTo>
+                    <a:pt x="1862185" y="1533014"/>
+                  </a:lnTo>
+                  <a:lnTo>
+                    <a:pt x="1933808" y="1571754"/>
+                  </a:lnTo>
+                  <a:lnTo>
+                    <a:pt x="2005430" y="1609374"/>
+                  </a:lnTo>
+                  <a:lnTo>
+                    <a:pt x="2077053" y="1645906"/>
+                  </a:lnTo>
+                  <a:lnTo>
+                    <a:pt x="2148675" y="1681382"/>
+                  </a:lnTo>
+                  <a:lnTo>
+                    <a:pt x="2220298" y="1715833"/>
+                  </a:lnTo>
+                  <a:lnTo>
+                    <a:pt x="2291920" y="1749288"/>
+                  </a:lnTo>
+                  <a:lnTo>
+                    <a:pt x="2363543" y="1781776"/>
+                  </a:lnTo>
+                  <a:lnTo>
+                    <a:pt x="2435165" y="1813326"/>
+                  </a:lnTo>
+                  <a:lnTo>
+                    <a:pt x="2506788" y="1843963"/>
+                  </a:lnTo>
+                  <a:lnTo>
+                    <a:pt x="2578410" y="1873714"/>
+                  </a:lnTo>
+                  <a:lnTo>
+                    <a:pt x="2650033" y="1902606"/>
+                  </a:lnTo>
+                  <a:lnTo>
+                    <a:pt x="2721655" y="1930663"/>
+                  </a:lnTo>
+                  <a:lnTo>
+                    <a:pt x="2793278" y="1957908"/>
+                  </a:lnTo>
+                  <a:lnTo>
+                    <a:pt x="2864901" y="1984367"/>
+                  </a:lnTo>
+                  <a:lnTo>
+                    <a:pt x="2936523" y="2010060"/>
+                  </a:lnTo>
+                  <a:lnTo>
+                    <a:pt x="3008146" y="2035011"/>
+                  </a:lnTo>
+                  <a:lnTo>
+                    <a:pt x="3079768" y="2050299"/>
+                  </a:lnTo>
+                  <a:lnTo>
+                    <a:pt x="3151391" y="2060329"/>
+                  </a:lnTo>
+                  <a:lnTo>
+                    <a:pt x="3223013" y="2070237"/>
+                  </a:lnTo>
+                  <a:lnTo>
+                    <a:pt x="3294636" y="2080024"/>
+                  </a:lnTo>
+                  <a:lnTo>
+                    <a:pt x="3366258" y="2089692"/>
+                  </a:lnTo>
+                  <a:lnTo>
+                    <a:pt x="3437881" y="2099242"/>
+                  </a:lnTo>
+                  <a:lnTo>
+                    <a:pt x="3509503" y="2108676"/>
+                  </a:lnTo>
+                  <a:lnTo>
+                    <a:pt x="3581126" y="2117995"/>
+                  </a:lnTo>
+                  <a:lnTo>
+                    <a:pt x="3652748" y="2127200"/>
+                  </a:lnTo>
+                  <a:lnTo>
+                    <a:pt x="3724371" y="2136293"/>
+                  </a:lnTo>
+                  <a:lnTo>
+                    <a:pt x="3795993" y="2145275"/>
+                  </a:lnTo>
+                  <a:lnTo>
+                    <a:pt x="3867616" y="2154148"/>
+                  </a:lnTo>
+                  <a:lnTo>
+                    <a:pt x="3939238" y="2162912"/>
+                  </a:lnTo>
+                  <a:lnTo>
+                    <a:pt x="4010861" y="2171570"/>
+                  </a:lnTo>
+                  <a:lnTo>
+                    <a:pt x="4082483" y="2180122"/>
+                  </a:lnTo>
+                  <a:lnTo>
+                    <a:pt x="4154106" y="2188570"/>
+                  </a:lnTo>
+                  <a:lnTo>
+                    <a:pt x="4225729" y="2196915"/>
+                  </a:lnTo>
+                  <a:lnTo>
+                    <a:pt x="4297351" y="2205159"/>
+                  </a:lnTo>
+                  <a:lnTo>
+                    <a:pt x="4368974" y="2213302"/>
+                  </a:lnTo>
+                  <a:lnTo>
+                    <a:pt x="4440596" y="2221345"/>
+                  </a:lnTo>
+                  <a:lnTo>
+                    <a:pt x="4512219" y="2229291"/>
+                  </a:lnTo>
+                  <a:lnTo>
+                    <a:pt x="4583841" y="2237139"/>
+                  </a:lnTo>
+                  <a:lnTo>
+                    <a:pt x="4655464" y="2244893"/>
+                  </a:lnTo>
+                  <a:lnTo>
+                    <a:pt x="4727086" y="2252551"/>
+                  </a:lnTo>
+                  <a:lnTo>
+                    <a:pt x="4798709" y="2260116"/>
+                  </a:lnTo>
+                  <a:lnTo>
+                    <a:pt x="4870331" y="2267589"/>
+                  </a:lnTo>
+                  <a:lnTo>
+                    <a:pt x="4941954" y="2274971"/>
+                  </a:lnTo>
+                  <a:lnTo>
+                    <a:pt x="5013576" y="2282263"/>
+                  </a:lnTo>
+                  <a:lnTo>
+                    <a:pt x="5085199" y="2289467"/>
+                  </a:lnTo>
+                  <a:lnTo>
+                    <a:pt x="5156821" y="2296582"/>
+                  </a:lnTo>
+                  <a:lnTo>
+                    <a:pt x="5228444" y="2303610"/>
+                  </a:lnTo>
+                  <a:lnTo>
+                    <a:pt x="5300066" y="2310553"/>
+                  </a:lnTo>
+                  <a:lnTo>
+                    <a:pt x="5371689" y="2317412"/>
+                  </a:lnTo>
+                  <a:lnTo>
+                    <a:pt x="5443311" y="2324187"/>
+                  </a:lnTo>
+                  <a:lnTo>
+                    <a:pt x="5514934" y="2330879"/>
+                  </a:lnTo>
+                  <a:lnTo>
+                    <a:pt x="5586557" y="2337489"/>
+                  </a:lnTo>
+                  <a:lnTo>
+                    <a:pt x="5658179" y="2344019"/>
+                  </a:lnTo>
+                  <a:lnTo>
+                    <a:pt x="5729802" y="2350470"/>
+                  </a:lnTo>
+                  <a:lnTo>
+                    <a:pt x="5801424" y="2356842"/>
+                  </a:lnTo>
+                  <a:lnTo>
+                    <a:pt x="5873047" y="2363136"/>
+                  </a:lnTo>
+                  <a:lnTo>
+                    <a:pt x="5944669" y="2369353"/>
+                  </a:lnTo>
+                  <a:lnTo>
+                    <a:pt x="6016292" y="2375495"/>
+                  </a:lnTo>
+                  <a:lnTo>
+                    <a:pt x="6087914" y="2381562"/>
+                  </a:lnTo>
+                  <a:lnTo>
+                    <a:pt x="6159537" y="2387555"/>
+                  </a:lnTo>
+                  <a:lnTo>
+                    <a:pt x="6231159" y="2393475"/>
+                  </a:lnTo>
+                  <a:lnTo>
+                    <a:pt x="6302782" y="2399322"/>
+                  </a:lnTo>
+                  <a:lnTo>
+                    <a:pt x="6374404" y="2405099"/>
+                  </a:lnTo>
+                  <a:lnTo>
+                    <a:pt x="6446027" y="2410805"/>
+                  </a:lnTo>
+                  <a:lnTo>
+                    <a:pt x="6517649" y="2416441"/>
+                  </a:lnTo>
+                  <a:lnTo>
+                    <a:pt x="6589272" y="2422009"/>
+                  </a:lnTo>
+                  <a:lnTo>
+                    <a:pt x="6660894" y="2427509"/>
+                  </a:lnTo>
+                  <a:lnTo>
+                    <a:pt x="6732517" y="2432942"/>
+                  </a:lnTo>
+                  <a:lnTo>
+                    <a:pt x="6804139" y="2438309"/>
+                  </a:lnTo>
+                  <a:lnTo>
+                    <a:pt x="6875762" y="2443610"/>
+                  </a:lnTo>
+                  <a:lnTo>
+                    <a:pt x="6947385" y="2448847"/>
+                  </a:lnTo>
+                  <a:lnTo>
+                    <a:pt x="7019007" y="2454019"/>
+                  </a:lnTo>
+                  <a:lnTo>
+                    <a:pt x="7090630" y="2459129"/>
                   </a:lnTo>
                 </a:path>
               </a:pathLst>
@@ -4001,309 +4001,309 @@
           </p:nvSpPr>
           <p:spPr>
             <a:xfrm>
-              <a:off x="1172049" y="4169470"/>
-              <a:ext cx="7090630" cy="1229245"/>
+              <a:off x="1172049" y="4162844"/>
+              <a:ext cx="7090630" cy="1236891"/>
             </a:xfrm>
             <a:custGeom>
               <a:avLst/>
               <a:pathLst>
-                <a:path w="7090630" h="1229245">
+                <a:path w="7090630" h="1236891">
                   <a:moveTo>
-                    <a:pt x="7090630" y="1229245"/>
+                    <a:pt x="7090630" y="1236891"/>
                   </a:moveTo>
                   <a:lnTo>
-                    <a:pt x="7019007" y="1224545"/>
-                  </a:lnTo>
-                  <a:lnTo>
-                    <a:pt x="6947385" y="1219705"/>
-                  </a:lnTo>
-                  <a:lnTo>
-                    <a:pt x="6875762" y="1214723"/>
-                  </a:lnTo>
-                  <a:lnTo>
-                    <a:pt x="6804139" y="1209592"/>
-                  </a:lnTo>
-                  <a:lnTo>
-                    <a:pt x="6732517" y="1204309"/>
-                  </a:lnTo>
-                  <a:lnTo>
-                    <a:pt x="6660894" y="1198870"/>
-                  </a:lnTo>
-                  <a:lnTo>
-                    <a:pt x="6589272" y="1193269"/>
-                  </a:lnTo>
-                  <a:lnTo>
-                    <a:pt x="6517649" y="1187502"/>
-                  </a:lnTo>
-                  <a:lnTo>
-                    <a:pt x="6446027" y="1181565"/>
-                  </a:lnTo>
-                  <a:lnTo>
-                    <a:pt x="6374404" y="1175451"/>
-                  </a:lnTo>
-                  <a:lnTo>
-                    <a:pt x="6302782" y="1169156"/>
-                  </a:lnTo>
-                  <a:lnTo>
-                    <a:pt x="6231159" y="1162675"/>
-                  </a:lnTo>
-                  <a:lnTo>
-                    <a:pt x="6159537" y="1156001"/>
-                  </a:lnTo>
-                  <a:lnTo>
-                    <a:pt x="6087914" y="1149129"/>
-                  </a:lnTo>
-                  <a:lnTo>
-                    <a:pt x="6016292" y="1142054"/>
-                  </a:lnTo>
-                  <a:lnTo>
-                    <a:pt x="5944669" y="1134769"/>
-                  </a:lnTo>
-                  <a:lnTo>
-                    <a:pt x="5873047" y="1127268"/>
-                  </a:lnTo>
-                  <a:lnTo>
-                    <a:pt x="5801424" y="1119545"/>
-                  </a:lnTo>
-                  <a:lnTo>
-                    <a:pt x="5729802" y="1111592"/>
-                  </a:lnTo>
-                  <a:lnTo>
-                    <a:pt x="5658179" y="1103404"/>
-                  </a:lnTo>
-                  <a:lnTo>
-                    <a:pt x="5586557" y="1094973"/>
-                  </a:lnTo>
-                  <a:lnTo>
-                    <a:pt x="5514934" y="1086292"/>
-                  </a:lnTo>
-                  <a:lnTo>
-                    <a:pt x="5443311" y="1077354"/>
-                  </a:lnTo>
-                  <a:lnTo>
-                    <a:pt x="5371689" y="1068151"/>
-                  </a:lnTo>
-                  <a:lnTo>
-                    <a:pt x="5300066" y="1058675"/>
-                  </a:lnTo>
-                  <a:lnTo>
-                    <a:pt x="5228444" y="1048918"/>
-                  </a:lnTo>
-                  <a:lnTo>
-                    <a:pt x="5156821" y="1038871"/>
-                  </a:lnTo>
-                  <a:lnTo>
-                    <a:pt x="5085199" y="1028527"/>
-                  </a:lnTo>
-                  <a:lnTo>
-                    <a:pt x="5013576" y="1017876"/>
-                  </a:lnTo>
-                  <a:lnTo>
-                    <a:pt x="4941954" y="1006910"/>
-                  </a:lnTo>
-                  <a:lnTo>
-                    <a:pt x="4870331" y="995618"/>
-                  </a:lnTo>
-                  <a:lnTo>
-                    <a:pt x="4798709" y="983991"/>
-                  </a:lnTo>
-                  <a:lnTo>
-                    <a:pt x="4727086" y="972020"/>
-                  </a:lnTo>
-                  <a:lnTo>
-                    <a:pt x="4655464" y="959694"/>
-                  </a:lnTo>
-                  <a:lnTo>
-                    <a:pt x="4583841" y="947003"/>
-                  </a:lnTo>
-                  <a:lnTo>
-                    <a:pt x="4512219" y="933935"/>
-                  </a:lnTo>
-                  <a:lnTo>
-                    <a:pt x="4440596" y="920480"/>
-                  </a:lnTo>
-                  <a:lnTo>
-                    <a:pt x="4368974" y="906625"/>
-                  </a:lnTo>
-                  <a:lnTo>
-                    <a:pt x="4297351" y="892360"/>
-                  </a:lnTo>
-                  <a:lnTo>
-                    <a:pt x="4225729" y="877673"/>
-                  </a:lnTo>
-                  <a:lnTo>
-                    <a:pt x="4154106" y="862549"/>
-                  </a:lnTo>
-                  <a:lnTo>
-                    <a:pt x="4082483" y="846978"/>
-                  </a:lnTo>
-                  <a:lnTo>
-                    <a:pt x="4010861" y="830945"/>
-                  </a:lnTo>
-                  <a:lnTo>
-                    <a:pt x="3939238" y="814436"/>
-                  </a:lnTo>
-                  <a:lnTo>
-                    <a:pt x="3867616" y="797438"/>
-                  </a:lnTo>
-                  <a:lnTo>
-                    <a:pt x="3795993" y="779936"/>
-                  </a:lnTo>
-                  <a:lnTo>
-                    <a:pt x="3724371" y="761915"/>
-                  </a:lnTo>
-                  <a:lnTo>
-                    <a:pt x="3652748" y="743360"/>
-                  </a:lnTo>
-                  <a:lnTo>
-                    <a:pt x="3581126" y="724255"/>
-                  </a:lnTo>
-                  <a:lnTo>
-                    <a:pt x="3509503" y="704583"/>
-                  </a:lnTo>
-                  <a:lnTo>
-                    <a:pt x="3437881" y="684328"/>
-                  </a:lnTo>
-                  <a:lnTo>
-                    <a:pt x="3366258" y="663473"/>
-                  </a:lnTo>
-                  <a:lnTo>
-                    <a:pt x="3294636" y="641999"/>
-                  </a:lnTo>
-                  <a:lnTo>
-                    <a:pt x="3223013" y="619889"/>
-                  </a:lnTo>
-                  <a:lnTo>
-                    <a:pt x="3151391" y="597123"/>
-                  </a:lnTo>
-                  <a:lnTo>
-                    <a:pt x="3079768" y="573682"/>
-                  </a:lnTo>
-                  <a:lnTo>
-                    <a:pt x="3008146" y="554679"/>
-                  </a:lnTo>
-                  <a:lnTo>
-                    <a:pt x="2936523" y="544495"/>
-                  </a:lnTo>
-                  <a:lnTo>
-                    <a:pt x="2864901" y="534187"/>
-                  </a:lnTo>
-                  <a:lnTo>
-                    <a:pt x="2793278" y="523752"/>
-                  </a:lnTo>
-                  <a:lnTo>
-                    <a:pt x="2721655" y="513190"/>
-                  </a:lnTo>
-                  <a:lnTo>
-                    <a:pt x="2650033" y="502499"/>
-                  </a:lnTo>
-                  <a:lnTo>
-                    <a:pt x="2578410" y="491677"/>
-                  </a:lnTo>
-                  <a:lnTo>
-                    <a:pt x="2506788" y="480723"/>
-                  </a:lnTo>
-                  <a:lnTo>
-                    <a:pt x="2435165" y="469635"/>
-                  </a:lnTo>
-                  <a:lnTo>
-                    <a:pt x="2363543" y="458411"/>
-                  </a:lnTo>
-                  <a:lnTo>
-                    <a:pt x="2291920" y="447050"/>
-                  </a:lnTo>
-                  <a:lnTo>
-                    <a:pt x="2220298" y="435551"/>
-                  </a:lnTo>
-                  <a:lnTo>
-                    <a:pt x="2148675" y="423910"/>
-                  </a:lnTo>
-                  <a:lnTo>
-                    <a:pt x="2077053" y="412128"/>
-                  </a:lnTo>
-                  <a:lnTo>
-                    <a:pt x="2005430" y="400201"/>
-                  </a:lnTo>
-                  <a:lnTo>
-                    <a:pt x="1933808" y="388129"/>
-                  </a:lnTo>
-                  <a:lnTo>
-                    <a:pt x="1862185" y="375909"/>
-                  </a:lnTo>
-                  <a:lnTo>
-                    <a:pt x="1790563" y="363539"/>
-                  </a:lnTo>
-                  <a:lnTo>
-                    <a:pt x="1718940" y="351019"/>
-                  </a:lnTo>
-                  <a:lnTo>
-                    <a:pt x="1647318" y="338345"/>
-                  </a:lnTo>
-                  <a:lnTo>
-                    <a:pt x="1575695" y="325516"/>
-                  </a:lnTo>
-                  <a:lnTo>
-                    <a:pt x="1504073" y="312531"/>
-                  </a:lnTo>
-                  <a:lnTo>
-                    <a:pt x="1432450" y="299387"/>
-                  </a:lnTo>
-                  <a:lnTo>
-                    <a:pt x="1360827" y="286082"/>
-                  </a:lnTo>
-                  <a:lnTo>
-                    <a:pt x="1289205" y="272615"/>
-                  </a:lnTo>
-                  <a:lnTo>
-                    <a:pt x="1217582" y="258982"/>
-                  </a:lnTo>
-                  <a:lnTo>
-                    <a:pt x="1145960" y="245184"/>
-                  </a:lnTo>
-                  <a:lnTo>
-                    <a:pt x="1074337" y="231216"/>
-                  </a:lnTo>
-                  <a:lnTo>
-                    <a:pt x="1002715" y="217078"/>
-                  </a:lnTo>
-                  <a:lnTo>
-                    <a:pt x="931092" y="202767"/>
-                  </a:lnTo>
-                  <a:lnTo>
-                    <a:pt x="859470" y="188281"/>
-                  </a:lnTo>
-                  <a:lnTo>
-                    <a:pt x="787847" y="173618"/>
-                  </a:lnTo>
-                  <a:lnTo>
-                    <a:pt x="716225" y="158776"/>
-                  </a:lnTo>
-                  <a:lnTo>
-                    <a:pt x="644602" y="143752"/>
-                  </a:lnTo>
-                  <a:lnTo>
-                    <a:pt x="572980" y="128545"/>
-                  </a:lnTo>
-                  <a:lnTo>
-                    <a:pt x="501357" y="113152"/>
-                  </a:lnTo>
-                  <a:lnTo>
-                    <a:pt x="429735" y="97570"/>
-                  </a:lnTo>
-                  <a:lnTo>
-                    <a:pt x="358112" y="81798"/>
-                  </a:lnTo>
-                  <a:lnTo>
-                    <a:pt x="286490" y="65834"/>
-                  </a:lnTo>
-                  <a:lnTo>
-                    <a:pt x="214867" y="49674"/>
-                  </a:lnTo>
-                  <a:lnTo>
-                    <a:pt x="143245" y="33317"/>
-                  </a:lnTo>
-                  <a:lnTo>
-                    <a:pt x="71622" y="16759"/>
+                    <a:pt x="7019007" y="1232203"/>
+                  </a:lnTo>
+                  <a:lnTo>
+                    <a:pt x="6947385" y="1227375"/>
+                  </a:lnTo>
+                  <a:lnTo>
+                    <a:pt x="6875762" y="1222404"/>
+                  </a:lnTo>
+                  <a:lnTo>
+                    <a:pt x="6804139" y="1217284"/>
+                  </a:lnTo>
+                  <a:lnTo>
+                    <a:pt x="6732517" y="1212012"/>
+                  </a:lnTo>
+                  <a:lnTo>
+                    <a:pt x="6660894" y="1206583"/>
+                  </a:lnTo>
+                  <a:lnTo>
+                    <a:pt x="6589272" y="1200993"/>
+                  </a:lnTo>
+                  <a:lnTo>
+                    <a:pt x="6517649" y="1195236"/>
+                  </a:lnTo>
+                  <a:lnTo>
+                    <a:pt x="6446027" y="1189308"/>
+                  </a:lnTo>
+                  <a:lnTo>
+                    <a:pt x="6374404" y="1183203"/>
+                  </a:lnTo>
+                  <a:lnTo>
+                    <a:pt x="6302782" y="1176917"/>
+                  </a:lnTo>
+                  <a:lnTo>
+                    <a:pt x="6231159" y="1170443"/>
+                  </a:lnTo>
+                  <a:lnTo>
+                    <a:pt x="6159537" y="1163777"/>
+                  </a:lnTo>
+                  <a:lnTo>
+                    <a:pt x="6087914" y="1156913"/>
+                  </a:lnTo>
+                  <a:lnTo>
+                    <a:pt x="6016292" y="1149844"/>
+                  </a:lnTo>
+                  <a:lnTo>
+                    <a:pt x="5944669" y="1142564"/>
+                  </a:lnTo>
+                  <a:lnTo>
+                    <a:pt x="5873047" y="1135069"/>
+                  </a:lnTo>
+                  <a:lnTo>
+                    <a:pt x="5801424" y="1127349"/>
+                  </a:lnTo>
+                  <a:lnTo>
+                    <a:pt x="5729802" y="1119401"/>
+                  </a:lnTo>
+                  <a:lnTo>
+                    <a:pt x="5658179" y="1111215"/>
+                  </a:lnTo>
+                  <a:lnTo>
+                    <a:pt x="5586557" y="1102786"/>
+                  </a:lnTo>
+                  <a:lnTo>
+                    <a:pt x="5514934" y="1094106"/>
+                  </a:lnTo>
+                  <a:lnTo>
+                    <a:pt x="5443311" y="1085168"/>
+                  </a:lnTo>
+                  <a:lnTo>
+                    <a:pt x="5371689" y="1075964"/>
+                  </a:lnTo>
+                  <a:lnTo>
+                    <a:pt x="5300066" y="1066485"/>
+                  </a:lnTo>
+                  <a:lnTo>
+                    <a:pt x="5228444" y="1056725"/>
+                  </a:lnTo>
+                  <a:lnTo>
+                    <a:pt x="5156821" y="1046674"/>
+                  </a:lnTo>
+                  <a:lnTo>
+                    <a:pt x="5085199" y="1036324"/>
+                  </a:lnTo>
+                  <a:lnTo>
+                    <a:pt x="5013576" y="1025666"/>
+                  </a:lnTo>
+                  <a:lnTo>
+                    <a:pt x="4941954" y="1014691"/>
+                  </a:lnTo>
+                  <a:lnTo>
+                    <a:pt x="4870331" y="1003388"/>
+                  </a:lnTo>
+                  <a:lnTo>
+                    <a:pt x="4798709" y="991750"/>
+                  </a:lnTo>
+                  <a:lnTo>
+                    <a:pt x="4727086" y="979765"/>
+                  </a:lnTo>
+                  <a:lnTo>
+                    <a:pt x="4655464" y="967424"/>
+                  </a:lnTo>
+                  <a:lnTo>
+                    <a:pt x="4583841" y="954715"/>
+                  </a:lnTo>
+                  <a:lnTo>
+                    <a:pt x="4512219" y="941627"/>
+                  </a:lnTo>
+                  <a:lnTo>
+                    <a:pt x="4440596" y="928151"/>
+                  </a:lnTo>
+                  <a:lnTo>
+                    <a:pt x="4368974" y="914273"/>
+                  </a:lnTo>
+                  <a:lnTo>
+                    <a:pt x="4297351" y="899982"/>
+                  </a:lnTo>
+                  <a:lnTo>
+                    <a:pt x="4225729" y="885265"/>
+                  </a:lnTo>
+                  <a:lnTo>
+                    <a:pt x="4154106" y="870111"/>
+                  </a:lnTo>
+                  <a:lnTo>
+                    <a:pt x="4082483" y="854506"/>
+                  </a:lnTo>
+                  <a:lnTo>
+                    <a:pt x="4010861" y="838436"/>
+                  </a:lnTo>
+                  <a:lnTo>
+                    <a:pt x="3939238" y="821887"/>
+                  </a:lnTo>
+                  <a:lnTo>
+                    <a:pt x="3867616" y="804847"/>
+                  </a:lnTo>
+                  <a:lnTo>
+                    <a:pt x="3795993" y="787299"/>
+                  </a:lnTo>
+                  <a:lnTo>
+                    <a:pt x="3724371" y="769228"/>
+                  </a:lnTo>
+                  <a:lnTo>
+                    <a:pt x="3652748" y="750620"/>
+                  </a:lnTo>
+                  <a:lnTo>
+                    <a:pt x="3581126" y="731458"/>
+                  </a:lnTo>
+                  <a:lnTo>
+                    <a:pt x="3509503" y="711726"/>
+                  </a:lnTo>
+                  <a:lnTo>
+                    <a:pt x="3437881" y="691406"/>
+                  </a:lnTo>
+                  <a:lnTo>
+                    <a:pt x="3366258" y="670482"/>
+                  </a:lnTo>
+                  <a:lnTo>
+                    <a:pt x="3294636" y="648934"/>
+                  </a:lnTo>
+                  <a:lnTo>
+                    <a:pt x="3223013" y="626746"/>
+                  </a:lnTo>
+                  <a:lnTo>
+                    <a:pt x="3151391" y="603897"/>
+                  </a:lnTo>
+                  <a:lnTo>
+                    <a:pt x="3079768" y="580367"/>
+                  </a:lnTo>
+                  <a:lnTo>
+                    <a:pt x="3008146" y="561272"/>
+                  </a:lnTo>
+                  <a:lnTo>
+                    <a:pt x="2936523" y="550992"/>
+                  </a:lnTo>
+                  <a:lnTo>
+                    <a:pt x="2864901" y="540586"/>
+                  </a:lnTo>
+                  <a:lnTo>
+                    <a:pt x="2793278" y="530052"/>
+                  </a:lnTo>
+                  <a:lnTo>
+                    <a:pt x="2721655" y="519387"/>
+                  </a:lnTo>
+                  <a:lnTo>
+                    <a:pt x="2650033" y="508591"/>
+                  </a:lnTo>
+                  <a:lnTo>
+                    <a:pt x="2578410" y="497662"/>
+                  </a:lnTo>
+                  <a:lnTo>
+                    <a:pt x="2506788" y="486598"/>
+                  </a:lnTo>
+                  <a:lnTo>
+                    <a:pt x="2435165" y="475397"/>
+                  </a:lnTo>
+                  <a:lnTo>
+                    <a:pt x="2363543" y="464059"/>
+                  </a:lnTo>
+                  <a:lnTo>
+                    <a:pt x="2291920" y="452580"/>
+                  </a:lnTo>
+                  <a:lnTo>
+                    <a:pt x="2220298" y="440959"/>
+                  </a:lnTo>
+                  <a:lnTo>
+                    <a:pt x="2148675" y="429196"/>
+                  </a:lnTo>
+                  <a:lnTo>
+                    <a:pt x="2077053" y="417287"/>
+                  </a:lnTo>
+                  <a:lnTo>
+                    <a:pt x="2005430" y="405231"/>
+                  </a:lnTo>
+                  <a:lnTo>
+                    <a:pt x="1933808" y="393027"/>
+                  </a:lnTo>
+                  <a:lnTo>
+                    <a:pt x="1862185" y="380671"/>
+                  </a:lnTo>
+                  <a:lnTo>
+                    <a:pt x="1790563" y="368164"/>
+                  </a:lnTo>
+                  <a:lnTo>
+                    <a:pt x="1718940" y="355502"/>
+                  </a:lnTo>
+                  <a:lnTo>
+                    <a:pt x="1647318" y="342684"/>
+                  </a:lnTo>
+                  <a:lnTo>
+                    <a:pt x="1575695" y="329708"/>
+                  </a:lnTo>
+                  <a:lnTo>
+                    <a:pt x="1504073" y="316571"/>
+                  </a:lnTo>
+                  <a:lnTo>
+                    <a:pt x="1432450" y="303273"/>
+                  </a:lnTo>
+                  <a:lnTo>
+                    <a:pt x="1360827" y="289810"/>
+                  </a:lnTo>
+                  <a:lnTo>
+                    <a:pt x="1289205" y="276182"/>
+                  </a:lnTo>
+                  <a:lnTo>
+                    <a:pt x="1217582" y="262385"/>
+                  </a:lnTo>
+                  <a:lnTo>
+                    <a:pt x="1145960" y="248418"/>
+                  </a:lnTo>
+                  <a:lnTo>
+                    <a:pt x="1074337" y="234279"/>
+                  </a:lnTo>
+                  <a:lnTo>
+                    <a:pt x="1002715" y="219965"/>
+                  </a:lnTo>
+                  <a:lnTo>
+                    <a:pt x="931092" y="205475"/>
+                  </a:lnTo>
+                  <a:lnTo>
+                    <a:pt x="859470" y="190805"/>
+                  </a:lnTo>
+                  <a:lnTo>
+                    <a:pt x="787847" y="175955"/>
+                  </a:lnTo>
+                  <a:lnTo>
+                    <a:pt x="716225" y="160922"/>
+                  </a:lnTo>
+                  <a:lnTo>
+                    <a:pt x="644602" y="145703"/>
+                  </a:lnTo>
+                  <a:lnTo>
+                    <a:pt x="572980" y="130296"/>
+                  </a:lnTo>
+                  <a:lnTo>
+                    <a:pt x="501357" y="114700"/>
+                  </a:lnTo>
+                  <a:lnTo>
+                    <a:pt x="429735" y="98911"/>
+                  </a:lnTo>
+                  <a:lnTo>
+                    <a:pt x="358112" y="82927"/>
+                  </a:lnTo>
+                  <a:lnTo>
+                    <a:pt x="286490" y="66745"/>
+                  </a:lnTo>
+                  <a:lnTo>
+                    <a:pt x="214867" y="50365"/>
+                  </a:lnTo>
+                  <a:lnTo>
+                    <a:pt x="143245" y="33782"/>
+                  </a:lnTo>
+                  <a:lnTo>
+                    <a:pt x="71622" y="16994"/>
                   </a:lnTo>
                   <a:lnTo>
                     <a:pt x="0" y="0"/>
@@ -4326,312 +4326,312 @@
           </p:nvSpPr>
           <p:spPr>
             <a:xfrm>
-              <a:off x="1172049" y="3565199"/>
-              <a:ext cx="7090630" cy="1734998"/>
+              <a:off x="1172049" y="3555622"/>
+              <a:ext cx="7090630" cy="1746218"/>
             </a:xfrm>
             <a:custGeom>
               <a:avLst/>
               <a:pathLst>
-                <a:path w="7090630" h="1734998">
+                <a:path w="7090630" h="1746218">
                   <a:moveTo>
                     <a:pt x="0" y="0"/>
                   </a:moveTo>
                   <a:lnTo>
-                    <a:pt x="71622" y="40778"/>
-                  </a:lnTo>
-                  <a:lnTo>
-                    <a:pt x="143245" y="80723"/>
-                  </a:lnTo>
-                  <a:lnTo>
-                    <a:pt x="214867" y="119849"/>
-                  </a:lnTo>
-                  <a:lnTo>
-                    <a:pt x="286490" y="158174"/>
-                  </a:lnTo>
-                  <a:lnTo>
-                    <a:pt x="358112" y="195715"/>
-                  </a:lnTo>
-                  <a:lnTo>
-                    <a:pt x="429735" y="232488"/>
-                  </a:lnTo>
-                  <a:lnTo>
-                    <a:pt x="501357" y="268507"/>
-                  </a:lnTo>
-                  <a:lnTo>
-                    <a:pt x="572980" y="303790"/>
-                  </a:lnTo>
-                  <a:lnTo>
-                    <a:pt x="644602" y="338350"/>
-                  </a:lnTo>
-                  <a:lnTo>
-                    <a:pt x="716225" y="372202"/>
-                  </a:lnTo>
-                  <a:lnTo>
-                    <a:pt x="787847" y="405362"/>
-                  </a:lnTo>
-                  <a:lnTo>
-                    <a:pt x="859470" y="437843"/>
-                  </a:lnTo>
-                  <a:lnTo>
-                    <a:pt x="931092" y="469659"/>
-                  </a:lnTo>
-                  <a:lnTo>
-                    <a:pt x="1002715" y="500823"/>
-                  </a:lnTo>
-                  <a:lnTo>
-                    <a:pt x="1074337" y="531350"/>
-                  </a:lnTo>
-                  <a:lnTo>
-                    <a:pt x="1145960" y="561252"/>
-                  </a:lnTo>
-                  <a:lnTo>
-                    <a:pt x="1217582" y="590541"/>
-                  </a:lnTo>
-                  <a:lnTo>
-                    <a:pt x="1289205" y="619231"/>
-                  </a:lnTo>
-                  <a:lnTo>
-                    <a:pt x="1360827" y="647334"/>
-                  </a:lnTo>
-                  <a:lnTo>
-                    <a:pt x="1432450" y="674861"/>
-                  </a:lnTo>
-                  <a:lnTo>
-                    <a:pt x="1504073" y="701825"/>
-                  </a:lnTo>
-                  <a:lnTo>
-                    <a:pt x="1575695" y="728237"/>
-                  </a:lnTo>
-                  <a:lnTo>
-                    <a:pt x="1647318" y="754109"/>
-                  </a:lnTo>
-                  <a:lnTo>
-                    <a:pt x="1718940" y="779450"/>
-                  </a:lnTo>
-                  <a:lnTo>
-                    <a:pt x="1790563" y="804273"/>
-                  </a:lnTo>
-                  <a:lnTo>
-                    <a:pt x="1862185" y="828588"/>
-                  </a:lnTo>
-                  <a:lnTo>
-                    <a:pt x="1933808" y="852405"/>
-                  </a:lnTo>
-                  <a:lnTo>
-                    <a:pt x="2005430" y="875734"/>
-                  </a:lnTo>
-                  <a:lnTo>
-                    <a:pt x="2077053" y="898586"/>
-                  </a:lnTo>
-                  <a:lnTo>
-                    <a:pt x="2148675" y="920970"/>
-                  </a:lnTo>
-                  <a:lnTo>
-                    <a:pt x="2220298" y="942896"/>
-                  </a:lnTo>
-                  <a:lnTo>
-                    <a:pt x="2291920" y="964373"/>
-                  </a:lnTo>
-                  <a:lnTo>
-                    <a:pt x="2363543" y="985411"/>
-                  </a:lnTo>
-                  <a:lnTo>
-                    <a:pt x="2435165" y="1006017"/>
-                  </a:lnTo>
-                  <a:lnTo>
-                    <a:pt x="2506788" y="1026202"/>
-                  </a:lnTo>
-                  <a:lnTo>
-                    <a:pt x="2578410" y="1045974"/>
-                  </a:lnTo>
-                  <a:lnTo>
-                    <a:pt x="2650033" y="1065341"/>
-                  </a:lnTo>
-                  <a:lnTo>
-                    <a:pt x="2721655" y="1084311"/>
-                  </a:lnTo>
-                  <a:lnTo>
-                    <a:pt x="2793278" y="1102894"/>
-                  </a:lnTo>
-                  <a:lnTo>
-                    <a:pt x="2864901" y="1121095"/>
-                  </a:lnTo>
-                  <a:lnTo>
-                    <a:pt x="2936523" y="1138924"/>
-                  </a:lnTo>
-                  <a:lnTo>
-                    <a:pt x="3008146" y="1156389"/>
-                  </a:lnTo>
-                  <a:lnTo>
-                    <a:pt x="3079768" y="1173495"/>
-                  </a:lnTo>
-                  <a:lnTo>
-                    <a:pt x="3151391" y="1190252"/>
-                  </a:lnTo>
-                  <a:lnTo>
-                    <a:pt x="3223013" y="1206665"/>
-                  </a:lnTo>
-                  <a:lnTo>
-                    <a:pt x="3294636" y="1222743"/>
-                  </a:lnTo>
-                  <a:lnTo>
-                    <a:pt x="3366258" y="1238491"/>
-                  </a:lnTo>
-                  <a:lnTo>
-                    <a:pt x="3437881" y="1253917"/>
-                  </a:lnTo>
-                  <a:lnTo>
-                    <a:pt x="3509503" y="1269027"/>
-                  </a:lnTo>
-                  <a:lnTo>
-                    <a:pt x="3581126" y="1283828"/>
-                  </a:lnTo>
-                  <a:lnTo>
-                    <a:pt x="3652748" y="1298326"/>
-                  </a:lnTo>
-                  <a:lnTo>
-                    <a:pt x="3724371" y="1312527"/>
-                  </a:lnTo>
-                  <a:lnTo>
-                    <a:pt x="3795993" y="1326437"/>
-                  </a:lnTo>
-                  <a:lnTo>
-                    <a:pt x="3867616" y="1340063"/>
-                  </a:lnTo>
-                  <a:lnTo>
-                    <a:pt x="3939238" y="1353410"/>
-                  </a:lnTo>
-                  <a:lnTo>
-                    <a:pt x="4010861" y="1366483"/>
-                  </a:lnTo>
-                  <a:lnTo>
-                    <a:pt x="4082483" y="1379289"/>
-                  </a:lnTo>
-                  <a:lnTo>
-                    <a:pt x="4154106" y="1391833"/>
-                  </a:lnTo>
-                  <a:lnTo>
-                    <a:pt x="4225729" y="1404120"/>
-                  </a:lnTo>
-                  <a:lnTo>
-                    <a:pt x="4297351" y="1416155"/>
-                  </a:lnTo>
-                  <a:lnTo>
-                    <a:pt x="4368974" y="1427944"/>
-                  </a:lnTo>
-                  <a:lnTo>
-                    <a:pt x="4440596" y="1439492"/>
-                  </a:lnTo>
-                  <a:lnTo>
-                    <a:pt x="4512219" y="1450803"/>
-                  </a:lnTo>
-                  <a:lnTo>
-                    <a:pt x="4583841" y="1461883"/>
-                  </a:lnTo>
-                  <a:lnTo>
-                    <a:pt x="4655464" y="1472736"/>
-                  </a:lnTo>
-                  <a:lnTo>
-                    <a:pt x="4727086" y="1483367"/>
-                  </a:lnTo>
-                  <a:lnTo>
-                    <a:pt x="4798709" y="1493780"/>
-                  </a:lnTo>
-                  <a:lnTo>
-                    <a:pt x="4870331" y="1503980"/>
-                  </a:lnTo>
-                  <a:lnTo>
-                    <a:pt x="4941954" y="1513971"/>
-                  </a:lnTo>
-                  <a:lnTo>
-                    <a:pt x="5013576" y="1523758"/>
-                  </a:lnTo>
-                  <a:lnTo>
-                    <a:pt x="5085199" y="1533344"/>
-                  </a:lnTo>
-                  <a:lnTo>
-                    <a:pt x="5156821" y="1542734"/>
-                  </a:lnTo>
-                  <a:lnTo>
-                    <a:pt x="5228444" y="1551932"/>
-                  </a:lnTo>
-                  <a:lnTo>
-                    <a:pt x="5300066" y="1560942"/>
-                  </a:lnTo>
-                  <a:lnTo>
-                    <a:pt x="5371689" y="1569767"/>
-                  </a:lnTo>
-                  <a:lnTo>
-                    <a:pt x="5443311" y="1578411"/>
-                  </a:lnTo>
-                  <a:lnTo>
-                    <a:pt x="5514934" y="1586879"/>
-                  </a:lnTo>
-                  <a:lnTo>
-                    <a:pt x="5586557" y="1595173"/>
-                  </a:lnTo>
-                  <a:lnTo>
-                    <a:pt x="5658179" y="1603297"/>
-                  </a:lnTo>
-                  <a:lnTo>
-                    <a:pt x="5729802" y="1611255"/>
-                  </a:lnTo>
-                  <a:lnTo>
-                    <a:pt x="5801424" y="1619051"/>
-                  </a:lnTo>
-                  <a:lnTo>
-                    <a:pt x="5873047" y="1626686"/>
-                  </a:lnTo>
-                  <a:lnTo>
-                    <a:pt x="5944669" y="1634166"/>
-                  </a:lnTo>
-                  <a:lnTo>
-                    <a:pt x="6016292" y="1641492"/>
-                  </a:lnTo>
-                  <a:lnTo>
-                    <a:pt x="6087914" y="1648668"/>
-                  </a:lnTo>
-                  <a:lnTo>
-                    <a:pt x="6159537" y="1655697"/>
-                  </a:lnTo>
-                  <a:lnTo>
-                    <a:pt x="6231159" y="1662583"/>
-                  </a:lnTo>
-                  <a:lnTo>
-                    <a:pt x="6302782" y="1669327"/>
-                  </a:lnTo>
-                  <a:lnTo>
-                    <a:pt x="6374404" y="1675934"/>
-                  </a:lnTo>
-                  <a:lnTo>
-                    <a:pt x="6446027" y="1682405"/>
-                  </a:lnTo>
-                  <a:lnTo>
-                    <a:pt x="6517649" y="1688743"/>
-                  </a:lnTo>
-                  <a:lnTo>
-                    <a:pt x="6589272" y="1694952"/>
-                  </a:lnTo>
-                  <a:lnTo>
-                    <a:pt x="6660894" y="1701034"/>
-                  </a:lnTo>
-                  <a:lnTo>
-                    <a:pt x="6732517" y="1706992"/>
-                  </a:lnTo>
-                  <a:lnTo>
-                    <a:pt x="6804139" y="1712827"/>
-                  </a:lnTo>
-                  <a:lnTo>
-                    <a:pt x="6875762" y="1718543"/>
-                  </a:lnTo>
-                  <a:lnTo>
-                    <a:pt x="6947385" y="1724142"/>
-                  </a:lnTo>
-                  <a:lnTo>
-                    <a:pt x="7019007" y="1729626"/>
-                  </a:lnTo>
-                  <a:lnTo>
-                    <a:pt x="7090630" y="1734998"/>
+                    <a:pt x="71622" y="41196"/>
+                  </a:lnTo>
+                  <a:lnTo>
+                    <a:pt x="143245" y="81545"/>
+                  </a:lnTo>
+                  <a:lnTo>
+                    <a:pt x="214867" y="121064"/>
+                  </a:lnTo>
+                  <a:lnTo>
+                    <a:pt x="286490" y="159769"/>
+                  </a:lnTo>
+                  <a:lnTo>
+                    <a:pt x="358112" y="197678"/>
+                  </a:lnTo>
+                  <a:lnTo>
+                    <a:pt x="429735" y="234806"/>
+                  </a:lnTo>
+                  <a:lnTo>
+                    <a:pt x="501357" y="271170"/>
+                  </a:lnTo>
+                  <a:lnTo>
+                    <a:pt x="572980" y="306786"/>
+                  </a:lnTo>
+                  <a:lnTo>
+                    <a:pt x="644602" y="341669"/>
+                  </a:lnTo>
+                  <a:lnTo>
+                    <a:pt x="716225" y="375834"/>
+                  </a:lnTo>
+                  <a:lnTo>
+                    <a:pt x="787847" y="409295"/>
+                  </a:lnTo>
+                  <a:lnTo>
+                    <a:pt x="859470" y="442068"/>
+                  </a:lnTo>
+                  <a:lnTo>
+                    <a:pt x="931092" y="474166"/>
+                  </a:lnTo>
+                  <a:lnTo>
+                    <a:pt x="1002715" y="505604"/>
+                  </a:lnTo>
+                  <a:lnTo>
+                    <a:pt x="1074337" y="536395"/>
+                  </a:lnTo>
+                  <a:lnTo>
+                    <a:pt x="1145960" y="566552"/>
+                  </a:lnTo>
+                  <a:lnTo>
+                    <a:pt x="1217582" y="596088"/>
+                  </a:lnTo>
+                  <a:lnTo>
+                    <a:pt x="1289205" y="625016"/>
+                  </a:lnTo>
+                  <a:lnTo>
+                    <a:pt x="1360827" y="653349"/>
+                  </a:lnTo>
+                  <a:lnTo>
+                    <a:pt x="1432450" y="681099"/>
+                  </a:lnTo>
+                  <a:lnTo>
+                    <a:pt x="1504073" y="708278"/>
+                  </a:lnTo>
+                  <a:lnTo>
+                    <a:pt x="1575695" y="734897"/>
+                  </a:lnTo>
+                  <a:lnTo>
+                    <a:pt x="1647318" y="760969"/>
+                  </a:lnTo>
+                  <a:lnTo>
+                    <a:pt x="1718940" y="786504"/>
+                  </a:lnTo>
+                  <a:lnTo>
+                    <a:pt x="1790563" y="811513"/>
+                  </a:lnTo>
+                  <a:lnTo>
+                    <a:pt x="1862185" y="836008"/>
+                  </a:lnTo>
+                  <a:lnTo>
+                    <a:pt x="1933808" y="859998"/>
+                  </a:lnTo>
+                  <a:lnTo>
+                    <a:pt x="2005430" y="883495"/>
+                  </a:lnTo>
+                  <a:lnTo>
+                    <a:pt x="2077053" y="906508"/>
+                  </a:lnTo>
+                  <a:lnTo>
+                    <a:pt x="2148675" y="929047"/>
+                  </a:lnTo>
+                  <a:lnTo>
+                    <a:pt x="2220298" y="951123"/>
+                  </a:lnTo>
+                  <a:lnTo>
+                    <a:pt x="2291920" y="972744"/>
+                  </a:lnTo>
+                  <a:lnTo>
+                    <a:pt x="2363543" y="993920"/>
+                  </a:lnTo>
+                  <a:lnTo>
+                    <a:pt x="2435165" y="1014660"/>
+                  </a:lnTo>
+                  <a:lnTo>
+                    <a:pt x="2506788" y="1034974"/>
+                  </a:lnTo>
+                  <a:lnTo>
+                    <a:pt x="2578410" y="1054869"/>
+                  </a:lnTo>
+                  <a:lnTo>
+                    <a:pt x="2650033" y="1074355"/>
+                  </a:lnTo>
+                  <a:lnTo>
+                    <a:pt x="2721655" y="1093440"/>
+                  </a:lnTo>
+                  <a:lnTo>
+                    <a:pt x="2793278" y="1112132"/>
+                  </a:lnTo>
+                  <a:lnTo>
+                    <a:pt x="2864901" y="1130439"/>
+                  </a:lnTo>
+                  <a:lnTo>
+                    <a:pt x="2936523" y="1148370"/>
+                  </a:lnTo>
+                  <a:lnTo>
+                    <a:pt x="3008146" y="1165931"/>
+                  </a:lnTo>
+                  <a:lnTo>
+                    <a:pt x="3079768" y="1183131"/>
+                  </a:lnTo>
+                  <a:lnTo>
+                    <a:pt x="3151391" y="1199977"/>
+                  </a:lnTo>
+                  <a:lnTo>
+                    <a:pt x="3223013" y="1216477"/>
+                  </a:lnTo>
+                  <a:lnTo>
+                    <a:pt x="3294636" y="1232636"/>
+                  </a:lnTo>
+                  <a:lnTo>
+                    <a:pt x="3366258" y="1248464"/>
+                  </a:lnTo>
+                  <a:lnTo>
+                    <a:pt x="3437881" y="1263965"/>
+                  </a:lnTo>
+                  <a:lnTo>
+                    <a:pt x="3509503" y="1279147"/>
+                  </a:lnTo>
+                  <a:lnTo>
+                    <a:pt x="3581126" y="1294017"/>
+                  </a:lnTo>
+                  <a:lnTo>
+                    <a:pt x="3652748" y="1308581"/>
+                  </a:lnTo>
+                  <a:lnTo>
+                    <a:pt x="3724371" y="1322845"/>
+                  </a:lnTo>
+                  <a:lnTo>
+                    <a:pt x="3795993" y="1336816"/>
+                  </a:lnTo>
+                  <a:lnTo>
+                    <a:pt x="3867616" y="1350499"/>
+                  </a:lnTo>
+                  <a:lnTo>
+                    <a:pt x="3939238" y="1363900"/>
+                  </a:lnTo>
+                  <a:lnTo>
+                    <a:pt x="4010861" y="1377025"/>
+                  </a:lnTo>
+                  <a:lnTo>
+                    <a:pt x="4082483" y="1389881"/>
+                  </a:lnTo>
+                  <a:lnTo>
+                    <a:pt x="4154106" y="1402472"/>
+                  </a:lnTo>
+                  <a:lnTo>
+                    <a:pt x="4225729" y="1414803"/>
+                  </a:lnTo>
+                  <a:lnTo>
+                    <a:pt x="4297351" y="1426881"/>
+                  </a:lnTo>
+                  <a:lnTo>
+                    <a:pt x="4368974" y="1438710"/>
+                  </a:lnTo>
+                  <a:lnTo>
+                    <a:pt x="4440596" y="1450296"/>
+                  </a:lnTo>
+                  <a:lnTo>
+                    <a:pt x="4512219" y="1461643"/>
+                  </a:lnTo>
+                  <a:lnTo>
+                    <a:pt x="4583841" y="1472757"/>
+                  </a:lnTo>
+                  <a:lnTo>
+                    <a:pt x="4655464" y="1483642"/>
+                  </a:lnTo>
+                  <a:lnTo>
+                    <a:pt x="4727086" y="1494303"/>
+                  </a:lnTo>
+                  <a:lnTo>
+                    <a:pt x="4798709" y="1504745"/>
+                  </a:lnTo>
+                  <a:lnTo>
+                    <a:pt x="4870331" y="1514971"/>
+                  </a:lnTo>
+                  <a:lnTo>
+                    <a:pt x="4941954" y="1524988"/>
+                  </a:lnTo>
+                  <a:lnTo>
+                    <a:pt x="5013576" y="1534798"/>
+                  </a:lnTo>
+                  <a:lnTo>
+                    <a:pt x="5085199" y="1544406"/>
+                  </a:lnTo>
+                  <a:lnTo>
+                    <a:pt x="5156821" y="1553816"/>
+                  </a:lnTo>
+                  <a:lnTo>
+                    <a:pt x="5228444" y="1563033"/>
+                  </a:lnTo>
+                  <a:lnTo>
+                    <a:pt x="5300066" y="1572060"/>
+                  </a:lnTo>
+                  <a:lnTo>
+                    <a:pt x="5371689" y="1580901"/>
+                  </a:lnTo>
+                  <a:lnTo>
+                    <a:pt x="5443311" y="1589560"/>
+                  </a:lnTo>
+                  <a:lnTo>
+                    <a:pt x="5514934" y="1598042"/>
+                  </a:lnTo>
+                  <a:lnTo>
+                    <a:pt x="5586557" y="1606348"/>
+                  </a:lnTo>
+                  <a:lnTo>
+                    <a:pt x="5658179" y="1614484"/>
+                  </a:lnTo>
+                  <a:lnTo>
+                    <a:pt x="5729802" y="1622452"/>
+                  </a:lnTo>
+                  <a:lnTo>
+                    <a:pt x="5801424" y="1630256"/>
+                  </a:lnTo>
+                  <a:lnTo>
+                    <a:pt x="5873047" y="1637899"/>
+                  </a:lnTo>
+                  <a:lnTo>
+                    <a:pt x="5944669" y="1645385"/>
+                  </a:lnTo>
+                  <a:lnTo>
+                    <a:pt x="6016292" y="1652717"/>
+                  </a:lnTo>
+                  <a:lnTo>
+                    <a:pt x="6087914" y="1659898"/>
+                  </a:lnTo>
+                  <a:lnTo>
+                    <a:pt x="6159537" y="1666932"/>
+                  </a:lnTo>
+                  <a:lnTo>
+                    <a:pt x="6231159" y="1673820"/>
+                  </a:lnTo>
+                  <a:lnTo>
+                    <a:pt x="6302782" y="1680567"/>
+                  </a:lnTo>
+                  <a:lnTo>
+                    <a:pt x="6374404" y="1687175"/>
+                  </a:lnTo>
+                  <a:lnTo>
+                    <a:pt x="6446027" y="1693647"/>
+                  </a:lnTo>
+                  <a:lnTo>
+                    <a:pt x="6517649" y="1699986"/>
+                  </a:lnTo>
+                  <a:lnTo>
+                    <a:pt x="6589272" y="1706194"/>
+                  </a:lnTo>
+                  <a:lnTo>
+                    <a:pt x="6660894" y="1712275"/>
+                  </a:lnTo>
+                  <a:lnTo>
+                    <a:pt x="6732517" y="1718230"/>
+                  </a:lnTo>
+                  <a:lnTo>
+                    <a:pt x="6804139" y="1724063"/>
+                  </a:lnTo>
+                  <a:lnTo>
+                    <a:pt x="6875762" y="1729776"/>
+                  </a:lnTo>
+                  <a:lnTo>
+                    <a:pt x="6947385" y="1735371"/>
+                  </a:lnTo>
+                  <a:lnTo>
+                    <a:pt x="7019007" y="1740851"/>
+                  </a:lnTo>
+                  <a:lnTo>
+                    <a:pt x="7090630" y="1746218"/>
                   </a:lnTo>
                 </a:path>
               </a:pathLst>
@@ -5371,7 +5371,7 @@
                   <a:latin typeface="Helvetica"/>
                   <a:cs typeface="Helvetica"/>
                 </a:rPr>
-                <a:t>subHR per 10 % decline: 1.29 (1.16-1.43), p_Bonf = &lt;0.001 (n = 6)  |  per IQR decline (Δ = 27.5 %): 2.00 (1.50-2.67)  |  IQR: [-29.1, -1.6] %</a:t>
+                <a:t>subHR per 10 % decline: 1.29 (1.16-1.43), p_Bonf = &lt;0.001 (n = 6)  |  per IQR decline (Δ = 27.5 %): 2.01 (1.51-2.68)  |  IQR: [-29.1, -1.6] %</a:t>
               </a:r>
             </a:p>
           </p:txBody>
